--- a/pptx_template/template.pptx
+++ b/pptx_template/template.pptx
@@ -3,12 +3,13 @@
 <p:presentation xmlns:a="http://schemas.openxmlformats.org/drawingml/2006/main" xmlns:r="http://schemas.openxmlformats.org/officeDocument/2006/relationships" xmlns:p="http://schemas.openxmlformats.org/presentationml/2006/main" saveSubsetFonts="1">
   <p:sldMasterIdLst>
     <p:sldMasterId id="2147483648" r:id="rId1"/>
+    <p:sldMasterId id="2147483660" r:id="rId2"/>
   </p:sldMasterIdLst>
   <p:notesMasterIdLst>
-    <p:notesMasterId r:id="rId3"/>
+    <p:notesMasterId r:id="rId4"/>
   </p:notesMasterIdLst>
   <p:sldIdLst>
-    <p:sldId id="4772" r:id="rId2"/>
+    <p:sldId id="4772" r:id="rId3"/>
   </p:sldIdLst>
   <p:sldSz cx="12192000" cy="6858000"/>
   <p:notesSz cx="6858000" cy="9144000"/>
@@ -197,7 +198,7 @@
           <a:p>
             <a:fld id="{17E1D49D-48C3-4654-940B-94FADE24DBDF}" type="datetimeFigureOut">
               <a:rPr lang="ko-KR" altLang="en-US" smtClean="0"/>
-              <a:t>2025-06-04</a:t>
+              <a:t>2025-07-17</a:t>
             </a:fld>
             <a:endParaRPr lang="ko-KR" altLang="en-US"/>
           </a:p>
@@ -779,7 +780,7 @@
           <a:p>
             <a:fld id="{502CD248-AE16-47FA-AF5A-2F10FD8A8207}" type="datetimeFigureOut">
               <a:rPr lang="ko-KR" altLang="en-US" smtClean="0"/>
-              <a:t>2025-06-04</a:t>
+              <a:t>2025-07-17</a:t>
             </a:fld>
             <a:endParaRPr lang="ko-KR" altLang="en-US"/>
           </a:p>
@@ -977,7 +978,7 @@
           <a:p>
             <a:fld id="{502CD248-AE16-47FA-AF5A-2F10FD8A8207}" type="datetimeFigureOut">
               <a:rPr lang="ko-KR" altLang="en-US" smtClean="0"/>
-              <a:t>2025-06-04</a:t>
+              <a:t>2025-07-17</a:t>
             </a:fld>
             <a:endParaRPr lang="ko-KR" altLang="en-US"/>
           </a:p>
@@ -1185,7 +1186,7 @@
           <a:p>
             <a:fld id="{502CD248-AE16-47FA-AF5A-2F10FD8A8207}" type="datetimeFigureOut">
               <a:rPr lang="ko-KR" altLang="en-US" smtClean="0"/>
-              <a:t>2025-06-04</a:t>
+              <a:t>2025-07-17</a:t>
             </a:fld>
             <a:endParaRPr lang="ko-KR" altLang="en-US"/>
           </a:p>
@@ -1249,6 +1250,1941 @@
     <p:extLst>
       <p:ext uri="{BB962C8B-B14F-4D97-AF65-F5344CB8AC3E}">
         <p14:creationId xmlns:p14="http://schemas.microsoft.com/office/powerpoint/2010/main" val="3952461349"/>
+      </p:ext>
+    </p:extLst>
+  </p:cSld>
+  <p:clrMapOvr>
+    <a:masterClrMapping/>
+  </p:clrMapOvr>
+</p:sldLayout>
+</file>
+
+<file path=ppt/slideLayouts/slideLayout12.xml><?xml version="1.0" encoding="utf-8"?>
+<p:sldLayout xmlns:a="http://schemas.openxmlformats.org/drawingml/2006/main" xmlns:r="http://schemas.openxmlformats.org/officeDocument/2006/relationships" xmlns:p="http://schemas.openxmlformats.org/presentationml/2006/main" type="title" preserve="1">
+  <p:cSld name="제목 슬라이드">
+    <p:spTree>
+      <p:nvGrpSpPr>
+        <p:cNvPr id="1" name=""/>
+        <p:cNvGrpSpPr/>
+        <p:nvPr/>
+      </p:nvGrpSpPr>
+      <p:grpSpPr>
+        <a:xfrm>
+          <a:off x="0" y="0"/>
+          <a:ext cx="0" cy="0"/>
+          <a:chOff x="0" y="0"/>
+          <a:chExt cx="0" cy="0"/>
+        </a:xfrm>
+      </p:grpSpPr>
+      <p:sp>
+        <p:nvSpPr>
+          <p:cNvPr id="2" name="제목 1">
+            <a:extLst>
+              <a:ext uri="{FF2B5EF4-FFF2-40B4-BE49-F238E27FC236}">
+                <a16:creationId xmlns:a16="http://schemas.microsoft.com/office/drawing/2014/main" id="{EA5E7732-32E2-EA1A-E2E1-BBB7D3A30B17}"/>
+              </a:ext>
+            </a:extLst>
+          </p:cNvPr>
+          <p:cNvSpPr>
+            <a:spLocks noGrp="1"/>
+          </p:cNvSpPr>
+          <p:nvPr>
+            <p:ph type="ctrTitle"/>
+          </p:nvPr>
+        </p:nvSpPr>
+        <p:spPr>
+          <a:xfrm>
+            <a:off x="1524000" y="1122363"/>
+            <a:ext cx="9144000" cy="2387600"/>
+          </a:xfrm>
+        </p:spPr>
+        <p:txBody>
+          <a:bodyPr anchor="b"/>
+          <a:lstStyle>
+            <a:lvl1pPr algn="ctr">
+              <a:defRPr sz="6000"/>
+            </a:lvl1pPr>
+          </a:lstStyle>
+          <a:p>
+            <a:r>
+              <a:rPr lang="ko-KR" altLang="en-US"/>
+              <a:t>마스터 제목 스타일 편집</a:t>
+            </a:r>
+          </a:p>
+        </p:txBody>
+      </p:sp>
+      <p:sp>
+        <p:nvSpPr>
+          <p:cNvPr id="3" name="부제목 2">
+            <a:extLst>
+              <a:ext uri="{FF2B5EF4-FFF2-40B4-BE49-F238E27FC236}">
+                <a16:creationId xmlns:a16="http://schemas.microsoft.com/office/drawing/2014/main" id="{1DB091D2-73F7-62D1-9DB5-D657B7275F33}"/>
+              </a:ext>
+            </a:extLst>
+          </p:cNvPr>
+          <p:cNvSpPr>
+            <a:spLocks noGrp="1"/>
+          </p:cNvSpPr>
+          <p:nvPr>
+            <p:ph type="subTitle" idx="1"/>
+          </p:nvPr>
+        </p:nvSpPr>
+        <p:spPr>
+          <a:xfrm>
+            <a:off x="1524000" y="3602038"/>
+            <a:ext cx="9144000" cy="1655762"/>
+          </a:xfrm>
+        </p:spPr>
+        <p:txBody>
+          <a:bodyPr/>
+          <a:lstStyle>
+            <a:lvl1pPr marL="0" indent="0" algn="ctr">
+              <a:buNone/>
+              <a:defRPr sz="2400"/>
+            </a:lvl1pPr>
+            <a:lvl2pPr marL="457200" indent="0" algn="ctr">
+              <a:buNone/>
+              <a:defRPr sz="2000"/>
+            </a:lvl2pPr>
+            <a:lvl3pPr marL="914400" indent="0" algn="ctr">
+              <a:buNone/>
+              <a:defRPr sz="1800"/>
+            </a:lvl3pPr>
+            <a:lvl4pPr marL="1371600" indent="0" algn="ctr">
+              <a:buNone/>
+              <a:defRPr sz="1600"/>
+            </a:lvl4pPr>
+            <a:lvl5pPr marL="1828800" indent="0" algn="ctr">
+              <a:buNone/>
+              <a:defRPr sz="1600"/>
+            </a:lvl5pPr>
+            <a:lvl6pPr marL="2286000" indent="0" algn="ctr">
+              <a:buNone/>
+              <a:defRPr sz="1600"/>
+            </a:lvl6pPr>
+            <a:lvl7pPr marL="2743200" indent="0" algn="ctr">
+              <a:buNone/>
+              <a:defRPr sz="1600"/>
+            </a:lvl7pPr>
+            <a:lvl8pPr marL="3200400" indent="0" algn="ctr">
+              <a:buNone/>
+              <a:defRPr sz="1600"/>
+            </a:lvl8pPr>
+            <a:lvl9pPr marL="3657600" indent="0" algn="ctr">
+              <a:buNone/>
+              <a:defRPr sz="1600"/>
+            </a:lvl9pPr>
+          </a:lstStyle>
+          <a:p>
+            <a:r>
+              <a:rPr lang="ko-KR" altLang="en-US"/>
+              <a:t>클릭하여 마스터 부제목 스타일 편집</a:t>
+            </a:r>
+          </a:p>
+        </p:txBody>
+      </p:sp>
+      <p:sp>
+        <p:nvSpPr>
+          <p:cNvPr id="4" name="날짜 개체 틀 3">
+            <a:extLst>
+              <a:ext uri="{FF2B5EF4-FFF2-40B4-BE49-F238E27FC236}">
+                <a16:creationId xmlns:a16="http://schemas.microsoft.com/office/drawing/2014/main" id="{92B2798A-6DB0-BEA1-4256-0986682FFD06}"/>
+              </a:ext>
+            </a:extLst>
+          </p:cNvPr>
+          <p:cNvSpPr>
+            <a:spLocks noGrp="1"/>
+          </p:cNvSpPr>
+          <p:nvPr>
+            <p:ph type="dt" sz="half" idx="10"/>
+          </p:nvPr>
+        </p:nvSpPr>
+        <p:spPr/>
+        <p:txBody>
+          <a:bodyPr/>
+          <a:lstStyle/>
+          <a:p>
+            <a:fld id="{995C7C8F-822A-4723-A724-B24BDCABEA27}" type="datetimeFigureOut">
+              <a:rPr lang="ko-KR" altLang="en-US" smtClean="0"/>
+              <a:t>2025-07-17</a:t>
+            </a:fld>
+            <a:endParaRPr lang="ko-KR" altLang="en-US"/>
+          </a:p>
+        </p:txBody>
+      </p:sp>
+      <p:sp>
+        <p:nvSpPr>
+          <p:cNvPr id="5" name="바닥글 개체 틀 4">
+            <a:extLst>
+              <a:ext uri="{FF2B5EF4-FFF2-40B4-BE49-F238E27FC236}">
+                <a16:creationId xmlns:a16="http://schemas.microsoft.com/office/drawing/2014/main" id="{5E8B68DD-A059-93C4-1F5D-6A536697BC89}"/>
+              </a:ext>
+            </a:extLst>
+          </p:cNvPr>
+          <p:cNvSpPr>
+            <a:spLocks noGrp="1"/>
+          </p:cNvSpPr>
+          <p:nvPr>
+            <p:ph type="ftr" sz="quarter" idx="11"/>
+          </p:nvPr>
+        </p:nvSpPr>
+        <p:spPr/>
+        <p:txBody>
+          <a:bodyPr/>
+          <a:lstStyle/>
+          <a:p>
+            <a:endParaRPr lang="ko-KR" altLang="en-US"/>
+          </a:p>
+        </p:txBody>
+      </p:sp>
+      <p:sp>
+        <p:nvSpPr>
+          <p:cNvPr id="6" name="슬라이드 번호 개체 틀 5">
+            <a:extLst>
+              <a:ext uri="{FF2B5EF4-FFF2-40B4-BE49-F238E27FC236}">
+                <a16:creationId xmlns:a16="http://schemas.microsoft.com/office/drawing/2014/main" id="{ED361E64-4588-5B75-120C-7465EF93FD3F}"/>
+              </a:ext>
+            </a:extLst>
+          </p:cNvPr>
+          <p:cNvSpPr>
+            <a:spLocks noGrp="1"/>
+          </p:cNvSpPr>
+          <p:nvPr>
+            <p:ph type="sldNum" sz="quarter" idx="12"/>
+          </p:nvPr>
+        </p:nvSpPr>
+        <p:spPr/>
+        <p:txBody>
+          <a:bodyPr/>
+          <a:lstStyle/>
+          <a:p>
+            <a:fld id="{6F89A9E9-A8B1-4524-AE75-5A6692DCE9C4}" type="slidenum">
+              <a:rPr lang="ko-KR" altLang="en-US" smtClean="0"/>
+              <a:t>‹#›</a:t>
+            </a:fld>
+            <a:endParaRPr lang="ko-KR" altLang="en-US"/>
+          </a:p>
+        </p:txBody>
+      </p:sp>
+    </p:spTree>
+    <p:extLst>
+      <p:ext uri="{BB962C8B-B14F-4D97-AF65-F5344CB8AC3E}">
+        <p14:creationId xmlns:p14="http://schemas.microsoft.com/office/powerpoint/2010/main" val="2901070255"/>
+      </p:ext>
+    </p:extLst>
+  </p:cSld>
+  <p:clrMapOvr>
+    <a:masterClrMapping/>
+  </p:clrMapOvr>
+</p:sldLayout>
+</file>
+
+<file path=ppt/slideLayouts/slideLayout13.xml><?xml version="1.0" encoding="utf-8"?>
+<p:sldLayout xmlns:a="http://schemas.openxmlformats.org/drawingml/2006/main" xmlns:r="http://schemas.openxmlformats.org/officeDocument/2006/relationships" xmlns:p="http://schemas.openxmlformats.org/presentationml/2006/main" type="obj" preserve="1">
+  <p:cSld name="제목 및 내용">
+    <p:spTree>
+      <p:nvGrpSpPr>
+        <p:cNvPr id="1" name=""/>
+        <p:cNvGrpSpPr/>
+        <p:nvPr/>
+      </p:nvGrpSpPr>
+      <p:grpSpPr>
+        <a:xfrm>
+          <a:off x="0" y="0"/>
+          <a:ext cx="0" cy="0"/>
+          <a:chOff x="0" y="0"/>
+          <a:chExt cx="0" cy="0"/>
+        </a:xfrm>
+      </p:grpSpPr>
+      <p:sp>
+        <p:nvSpPr>
+          <p:cNvPr id="2" name="제목 1">
+            <a:extLst>
+              <a:ext uri="{FF2B5EF4-FFF2-40B4-BE49-F238E27FC236}">
+                <a16:creationId xmlns:a16="http://schemas.microsoft.com/office/drawing/2014/main" id="{EA9E1A13-DA5E-B33E-9A0E-0311E5629425}"/>
+              </a:ext>
+            </a:extLst>
+          </p:cNvPr>
+          <p:cNvSpPr>
+            <a:spLocks noGrp="1"/>
+          </p:cNvSpPr>
+          <p:nvPr>
+            <p:ph type="title"/>
+          </p:nvPr>
+        </p:nvSpPr>
+        <p:spPr/>
+        <p:txBody>
+          <a:bodyPr/>
+          <a:lstStyle/>
+          <a:p>
+            <a:r>
+              <a:rPr lang="ko-KR" altLang="en-US"/>
+              <a:t>마스터 제목 스타일 편집</a:t>
+            </a:r>
+          </a:p>
+        </p:txBody>
+      </p:sp>
+      <p:sp>
+        <p:nvSpPr>
+          <p:cNvPr id="3" name="내용 개체 틀 2">
+            <a:extLst>
+              <a:ext uri="{FF2B5EF4-FFF2-40B4-BE49-F238E27FC236}">
+                <a16:creationId xmlns:a16="http://schemas.microsoft.com/office/drawing/2014/main" id="{32266AB5-8D3D-8EDE-52C9-0C759E7025C6}"/>
+              </a:ext>
+            </a:extLst>
+          </p:cNvPr>
+          <p:cNvSpPr>
+            <a:spLocks noGrp="1"/>
+          </p:cNvSpPr>
+          <p:nvPr>
+            <p:ph idx="1"/>
+          </p:nvPr>
+        </p:nvSpPr>
+        <p:spPr/>
+        <p:txBody>
+          <a:bodyPr/>
+          <a:lstStyle/>
+          <a:p>
+            <a:pPr lvl="0"/>
+            <a:r>
+              <a:rPr lang="ko-KR" altLang="en-US"/>
+              <a:t>마스터 텍스트 스타일을 편집하려면 클릭</a:t>
+            </a:r>
+          </a:p>
+          <a:p>
+            <a:pPr lvl="1"/>
+            <a:r>
+              <a:rPr lang="ko-KR" altLang="en-US"/>
+              <a:t>두 번째 수준</a:t>
+            </a:r>
+          </a:p>
+          <a:p>
+            <a:pPr lvl="2"/>
+            <a:r>
+              <a:rPr lang="ko-KR" altLang="en-US"/>
+              <a:t>세 번째 수준</a:t>
+            </a:r>
+          </a:p>
+          <a:p>
+            <a:pPr lvl="3"/>
+            <a:r>
+              <a:rPr lang="ko-KR" altLang="en-US"/>
+              <a:t>네 번째 수준</a:t>
+            </a:r>
+          </a:p>
+          <a:p>
+            <a:pPr lvl="4"/>
+            <a:r>
+              <a:rPr lang="ko-KR" altLang="en-US"/>
+              <a:t>다섯 번째 수준</a:t>
+            </a:r>
+          </a:p>
+        </p:txBody>
+      </p:sp>
+      <p:sp>
+        <p:nvSpPr>
+          <p:cNvPr id="4" name="날짜 개체 틀 3">
+            <a:extLst>
+              <a:ext uri="{FF2B5EF4-FFF2-40B4-BE49-F238E27FC236}">
+                <a16:creationId xmlns:a16="http://schemas.microsoft.com/office/drawing/2014/main" id="{ED78D646-0716-10BB-FB63-A1F534CDC24A}"/>
+              </a:ext>
+            </a:extLst>
+          </p:cNvPr>
+          <p:cNvSpPr>
+            <a:spLocks noGrp="1"/>
+          </p:cNvSpPr>
+          <p:nvPr>
+            <p:ph type="dt" sz="half" idx="10"/>
+          </p:nvPr>
+        </p:nvSpPr>
+        <p:spPr/>
+        <p:txBody>
+          <a:bodyPr/>
+          <a:lstStyle/>
+          <a:p>
+            <a:fld id="{995C7C8F-822A-4723-A724-B24BDCABEA27}" type="datetimeFigureOut">
+              <a:rPr lang="ko-KR" altLang="en-US" smtClean="0"/>
+              <a:t>2025-07-17</a:t>
+            </a:fld>
+            <a:endParaRPr lang="ko-KR" altLang="en-US"/>
+          </a:p>
+        </p:txBody>
+      </p:sp>
+      <p:sp>
+        <p:nvSpPr>
+          <p:cNvPr id="5" name="바닥글 개체 틀 4">
+            <a:extLst>
+              <a:ext uri="{FF2B5EF4-FFF2-40B4-BE49-F238E27FC236}">
+                <a16:creationId xmlns:a16="http://schemas.microsoft.com/office/drawing/2014/main" id="{872D52AF-0D65-4550-B685-CF373C35DA82}"/>
+              </a:ext>
+            </a:extLst>
+          </p:cNvPr>
+          <p:cNvSpPr>
+            <a:spLocks noGrp="1"/>
+          </p:cNvSpPr>
+          <p:nvPr>
+            <p:ph type="ftr" sz="quarter" idx="11"/>
+          </p:nvPr>
+        </p:nvSpPr>
+        <p:spPr/>
+        <p:txBody>
+          <a:bodyPr/>
+          <a:lstStyle/>
+          <a:p>
+            <a:endParaRPr lang="ko-KR" altLang="en-US"/>
+          </a:p>
+        </p:txBody>
+      </p:sp>
+      <p:sp>
+        <p:nvSpPr>
+          <p:cNvPr id="6" name="슬라이드 번호 개체 틀 5">
+            <a:extLst>
+              <a:ext uri="{FF2B5EF4-FFF2-40B4-BE49-F238E27FC236}">
+                <a16:creationId xmlns:a16="http://schemas.microsoft.com/office/drawing/2014/main" id="{86E7D448-A313-35A9-169F-E50806902BF2}"/>
+              </a:ext>
+            </a:extLst>
+          </p:cNvPr>
+          <p:cNvSpPr>
+            <a:spLocks noGrp="1"/>
+          </p:cNvSpPr>
+          <p:nvPr>
+            <p:ph type="sldNum" sz="quarter" idx="12"/>
+          </p:nvPr>
+        </p:nvSpPr>
+        <p:spPr/>
+        <p:txBody>
+          <a:bodyPr/>
+          <a:lstStyle/>
+          <a:p>
+            <a:fld id="{6F89A9E9-A8B1-4524-AE75-5A6692DCE9C4}" type="slidenum">
+              <a:rPr lang="ko-KR" altLang="en-US" smtClean="0"/>
+              <a:t>‹#›</a:t>
+            </a:fld>
+            <a:endParaRPr lang="ko-KR" altLang="en-US"/>
+          </a:p>
+        </p:txBody>
+      </p:sp>
+    </p:spTree>
+    <p:extLst>
+      <p:ext uri="{BB962C8B-B14F-4D97-AF65-F5344CB8AC3E}">
+        <p14:creationId xmlns:p14="http://schemas.microsoft.com/office/powerpoint/2010/main" val="339762027"/>
+      </p:ext>
+    </p:extLst>
+  </p:cSld>
+  <p:clrMapOvr>
+    <a:masterClrMapping/>
+  </p:clrMapOvr>
+</p:sldLayout>
+</file>
+
+<file path=ppt/slideLayouts/slideLayout14.xml><?xml version="1.0" encoding="utf-8"?>
+<p:sldLayout xmlns:a="http://schemas.openxmlformats.org/drawingml/2006/main" xmlns:r="http://schemas.openxmlformats.org/officeDocument/2006/relationships" xmlns:p="http://schemas.openxmlformats.org/presentationml/2006/main" type="secHead" preserve="1">
+  <p:cSld name="구역 머리글">
+    <p:spTree>
+      <p:nvGrpSpPr>
+        <p:cNvPr id="1" name=""/>
+        <p:cNvGrpSpPr/>
+        <p:nvPr/>
+      </p:nvGrpSpPr>
+      <p:grpSpPr>
+        <a:xfrm>
+          <a:off x="0" y="0"/>
+          <a:ext cx="0" cy="0"/>
+          <a:chOff x="0" y="0"/>
+          <a:chExt cx="0" cy="0"/>
+        </a:xfrm>
+      </p:grpSpPr>
+      <p:sp>
+        <p:nvSpPr>
+          <p:cNvPr id="2" name="제목 1">
+            <a:extLst>
+              <a:ext uri="{FF2B5EF4-FFF2-40B4-BE49-F238E27FC236}">
+                <a16:creationId xmlns:a16="http://schemas.microsoft.com/office/drawing/2014/main" id="{D3C91EF1-B869-6542-0BCB-4D4963023469}"/>
+              </a:ext>
+            </a:extLst>
+          </p:cNvPr>
+          <p:cNvSpPr>
+            <a:spLocks noGrp="1"/>
+          </p:cNvSpPr>
+          <p:nvPr>
+            <p:ph type="title"/>
+          </p:nvPr>
+        </p:nvSpPr>
+        <p:spPr>
+          <a:xfrm>
+            <a:off x="831850" y="1709738"/>
+            <a:ext cx="10515600" cy="2852737"/>
+          </a:xfrm>
+        </p:spPr>
+        <p:txBody>
+          <a:bodyPr anchor="b"/>
+          <a:lstStyle>
+            <a:lvl1pPr>
+              <a:defRPr sz="6000"/>
+            </a:lvl1pPr>
+          </a:lstStyle>
+          <a:p>
+            <a:r>
+              <a:rPr lang="ko-KR" altLang="en-US"/>
+              <a:t>마스터 제목 스타일 편집</a:t>
+            </a:r>
+          </a:p>
+        </p:txBody>
+      </p:sp>
+      <p:sp>
+        <p:nvSpPr>
+          <p:cNvPr id="3" name="텍스트 개체 틀 2">
+            <a:extLst>
+              <a:ext uri="{FF2B5EF4-FFF2-40B4-BE49-F238E27FC236}">
+                <a16:creationId xmlns:a16="http://schemas.microsoft.com/office/drawing/2014/main" id="{CCA5D62D-067D-5329-00DF-AA81F95AE48D}"/>
+              </a:ext>
+            </a:extLst>
+          </p:cNvPr>
+          <p:cNvSpPr>
+            <a:spLocks noGrp="1"/>
+          </p:cNvSpPr>
+          <p:nvPr>
+            <p:ph type="body" idx="1"/>
+          </p:nvPr>
+        </p:nvSpPr>
+        <p:spPr>
+          <a:xfrm>
+            <a:off x="831850" y="4589463"/>
+            <a:ext cx="10515600" cy="1500187"/>
+          </a:xfrm>
+        </p:spPr>
+        <p:txBody>
+          <a:bodyPr/>
+          <a:lstStyle>
+            <a:lvl1pPr marL="0" indent="0">
+              <a:buNone/>
+              <a:defRPr sz="2400">
+                <a:solidFill>
+                  <a:schemeClr val="tx1">
+                    <a:tint val="75000"/>
+                  </a:schemeClr>
+                </a:solidFill>
+              </a:defRPr>
+            </a:lvl1pPr>
+            <a:lvl2pPr marL="457200" indent="0">
+              <a:buNone/>
+              <a:defRPr sz="2000">
+                <a:solidFill>
+                  <a:schemeClr val="tx1">
+                    <a:tint val="75000"/>
+                  </a:schemeClr>
+                </a:solidFill>
+              </a:defRPr>
+            </a:lvl2pPr>
+            <a:lvl3pPr marL="914400" indent="0">
+              <a:buNone/>
+              <a:defRPr sz="1800">
+                <a:solidFill>
+                  <a:schemeClr val="tx1">
+                    <a:tint val="75000"/>
+                  </a:schemeClr>
+                </a:solidFill>
+              </a:defRPr>
+            </a:lvl3pPr>
+            <a:lvl4pPr marL="1371600" indent="0">
+              <a:buNone/>
+              <a:defRPr sz="1600">
+                <a:solidFill>
+                  <a:schemeClr val="tx1">
+                    <a:tint val="75000"/>
+                  </a:schemeClr>
+                </a:solidFill>
+              </a:defRPr>
+            </a:lvl4pPr>
+            <a:lvl5pPr marL="1828800" indent="0">
+              <a:buNone/>
+              <a:defRPr sz="1600">
+                <a:solidFill>
+                  <a:schemeClr val="tx1">
+                    <a:tint val="75000"/>
+                  </a:schemeClr>
+                </a:solidFill>
+              </a:defRPr>
+            </a:lvl5pPr>
+            <a:lvl6pPr marL="2286000" indent="0">
+              <a:buNone/>
+              <a:defRPr sz="1600">
+                <a:solidFill>
+                  <a:schemeClr val="tx1">
+                    <a:tint val="75000"/>
+                  </a:schemeClr>
+                </a:solidFill>
+              </a:defRPr>
+            </a:lvl6pPr>
+            <a:lvl7pPr marL="2743200" indent="0">
+              <a:buNone/>
+              <a:defRPr sz="1600">
+                <a:solidFill>
+                  <a:schemeClr val="tx1">
+                    <a:tint val="75000"/>
+                  </a:schemeClr>
+                </a:solidFill>
+              </a:defRPr>
+            </a:lvl7pPr>
+            <a:lvl8pPr marL="3200400" indent="0">
+              <a:buNone/>
+              <a:defRPr sz="1600">
+                <a:solidFill>
+                  <a:schemeClr val="tx1">
+                    <a:tint val="75000"/>
+                  </a:schemeClr>
+                </a:solidFill>
+              </a:defRPr>
+            </a:lvl8pPr>
+            <a:lvl9pPr marL="3657600" indent="0">
+              <a:buNone/>
+              <a:defRPr sz="1600">
+                <a:solidFill>
+                  <a:schemeClr val="tx1">
+                    <a:tint val="75000"/>
+                  </a:schemeClr>
+                </a:solidFill>
+              </a:defRPr>
+            </a:lvl9pPr>
+          </a:lstStyle>
+          <a:p>
+            <a:pPr lvl="0"/>
+            <a:r>
+              <a:rPr lang="ko-KR" altLang="en-US"/>
+              <a:t>마스터 텍스트 스타일을 편집하려면 클릭</a:t>
+            </a:r>
+          </a:p>
+        </p:txBody>
+      </p:sp>
+      <p:sp>
+        <p:nvSpPr>
+          <p:cNvPr id="4" name="날짜 개체 틀 3">
+            <a:extLst>
+              <a:ext uri="{FF2B5EF4-FFF2-40B4-BE49-F238E27FC236}">
+                <a16:creationId xmlns:a16="http://schemas.microsoft.com/office/drawing/2014/main" id="{F456674C-91CD-02C3-7F44-66820EEF1774}"/>
+              </a:ext>
+            </a:extLst>
+          </p:cNvPr>
+          <p:cNvSpPr>
+            <a:spLocks noGrp="1"/>
+          </p:cNvSpPr>
+          <p:nvPr>
+            <p:ph type="dt" sz="half" idx="10"/>
+          </p:nvPr>
+        </p:nvSpPr>
+        <p:spPr/>
+        <p:txBody>
+          <a:bodyPr/>
+          <a:lstStyle/>
+          <a:p>
+            <a:fld id="{995C7C8F-822A-4723-A724-B24BDCABEA27}" type="datetimeFigureOut">
+              <a:rPr lang="ko-KR" altLang="en-US" smtClean="0"/>
+              <a:t>2025-07-17</a:t>
+            </a:fld>
+            <a:endParaRPr lang="ko-KR" altLang="en-US"/>
+          </a:p>
+        </p:txBody>
+      </p:sp>
+      <p:sp>
+        <p:nvSpPr>
+          <p:cNvPr id="5" name="바닥글 개체 틀 4">
+            <a:extLst>
+              <a:ext uri="{FF2B5EF4-FFF2-40B4-BE49-F238E27FC236}">
+                <a16:creationId xmlns:a16="http://schemas.microsoft.com/office/drawing/2014/main" id="{77F8E788-5E59-2A93-D0B8-68E6EFE28978}"/>
+              </a:ext>
+            </a:extLst>
+          </p:cNvPr>
+          <p:cNvSpPr>
+            <a:spLocks noGrp="1"/>
+          </p:cNvSpPr>
+          <p:nvPr>
+            <p:ph type="ftr" sz="quarter" idx="11"/>
+          </p:nvPr>
+        </p:nvSpPr>
+        <p:spPr/>
+        <p:txBody>
+          <a:bodyPr/>
+          <a:lstStyle/>
+          <a:p>
+            <a:endParaRPr lang="ko-KR" altLang="en-US"/>
+          </a:p>
+        </p:txBody>
+      </p:sp>
+      <p:sp>
+        <p:nvSpPr>
+          <p:cNvPr id="6" name="슬라이드 번호 개체 틀 5">
+            <a:extLst>
+              <a:ext uri="{FF2B5EF4-FFF2-40B4-BE49-F238E27FC236}">
+                <a16:creationId xmlns:a16="http://schemas.microsoft.com/office/drawing/2014/main" id="{61ADFB97-1B7B-637A-EBF1-FE361FB9DEE2}"/>
+              </a:ext>
+            </a:extLst>
+          </p:cNvPr>
+          <p:cNvSpPr>
+            <a:spLocks noGrp="1"/>
+          </p:cNvSpPr>
+          <p:nvPr>
+            <p:ph type="sldNum" sz="quarter" idx="12"/>
+          </p:nvPr>
+        </p:nvSpPr>
+        <p:spPr/>
+        <p:txBody>
+          <a:bodyPr/>
+          <a:lstStyle/>
+          <a:p>
+            <a:fld id="{6F89A9E9-A8B1-4524-AE75-5A6692DCE9C4}" type="slidenum">
+              <a:rPr lang="ko-KR" altLang="en-US" smtClean="0"/>
+              <a:t>‹#›</a:t>
+            </a:fld>
+            <a:endParaRPr lang="ko-KR" altLang="en-US"/>
+          </a:p>
+        </p:txBody>
+      </p:sp>
+    </p:spTree>
+    <p:extLst>
+      <p:ext uri="{BB962C8B-B14F-4D97-AF65-F5344CB8AC3E}">
+        <p14:creationId xmlns:p14="http://schemas.microsoft.com/office/powerpoint/2010/main" val="1027380545"/>
+      </p:ext>
+    </p:extLst>
+  </p:cSld>
+  <p:clrMapOvr>
+    <a:masterClrMapping/>
+  </p:clrMapOvr>
+</p:sldLayout>
+</file>
+
+<file path=ppt/slideLayouts/slideLayout15.xml><?xml version="1.0" encoding="utf-8"?>
+<p:sldLayout xmlns:a="http://schemas.openxmlformats.org/drawingml/2006/main" xmlns:r="http://schemas.openxmlformats.org/officeDocument/2006/relationships" xmlns:p="http://schemas.openxmlformats.org/presentationml/2006/main" type="twoObj" preserve="1">
+  <p:cSld name="콘텐츠 2개">
+    <p:spTree>
+      <p:nvGrpSpPr>
+        <p:cNvPr id="1" name=""/>
+        <p:cNvGrpSpPr/>
+        <p:nvPr/>
+      </p:nvGrpSpPr>
+      <p:grpSpPr>
+        <a:xfrm>
+          <a:off x="0" y="0"/>
+          <a:ext cx="0" cy="0"/>
+          <a:chOff x="0" y="0"/>
+          <a:chExt cx="0" cy="0"/>
+        </a:xfrm>
+      </p:grpSpPr>
+      <p:sp>
+        <p:nvSpPr>
+          <p:cNvPr id="2" name="제목 1">
+            <a:extLst>
+              <a:ext uri="{FF2B5EF4-FFF2-40B4-BE49-F238E27FC236}">
+                <a16:creationId xmlns:a16="http://schemas.microsoft.com/office/drawing/2014/main" id="{C36F0453-CA82-E6D7-4368-0984B10B462C}"/>
+              </a:ext>
+            </a:extLst>
+          </p:cNvPr>
+          <p:cNvSpPr>
+            <a:spLocks noGrp="1"/>
+          </p:cNvSpPr>
+          <p:nvPr>
+            <p:ph type="title"/>
+          </p:nvPr>
+        </p:nvSpPr>
+        <p:spPr/>
+        <p:txBody>
+          <a:bodyPr/>
+          <a:lstStyle/>
+          <a:p>
+            <a:r>
+              <a:rPr lang="ko-KR" altLang="en-US"/>
+              <a:t>마스터 제목 스타일 편집</a:t>
+            </a:r>
+          </a:p>
+        </p:txBody>
+      </p:sp>
+      <p:sp>
+        <p:nvSpPr>
+          <p:cNvPr id="3" name="내용 개체 틀 2">
+            <a:extLst>
+              <a:ext uri="{FF2B5EF4-FFF2-40B4-BE49-F238E27FC236}">
+                <a16:creationId xmlns:a16="http://schemas.microsoft.com/office/drawing/2014/main" id="{2B489ACE-0973-6D9C-69B9-67811D09AF9B}"/>
+              </a:ext>
+            </a:extLst>
+          </p:cNvPr>
+          <p:cNvSpPr>
+            <a:spLocks noGrp="1"/>
+          </p:cNvSpPr>
+          <p:nvPr>
+            <p:ph sz="half" idx="1"/>
+          </p:nvPr>
+        </p:nvSpPr>
+        <p:spPr>
+          <a:xfrm>
+            <a:off x="838200" y="1825625"/>
+            <a:ext cx="5181600" cy="4351338"/>
+          </a:xfrm>
+        </p:spPr>
+        <p:txBody>
+          <a:bodyPr/>
+          <a:lstStyle/>
+          <a:p>
+            <a:pPr lvl="0"/>
+            <a:r>
+              <a:rPr lang="ko-KR" altLang="en-US"/>
+              <a:t>마스터 텍스트 스타일을 편집하려면 클릭</a:t>
+            </a:r>
+          </a:p>
+          <a:p>
+            <a:pPr lvl="1"/>
+            <a:r>
+              <a:rPr lang="ko-KR" altLang="en-US"/>
+              <a:t>두 번째 수준</a:t>
+            </a:r>
+          </a:p>
+          <a:p>
+            <a:pPr lvl="2"/>
+            <a:r>
+              <a:rPr lang="ko-KR" altLang="en-US"/>
+              <a:t>세 번째 수준</a:t>
+            </a:r>
+          </a:p>
+          <a:p>
+            <a:pPr lvl="3"/>
+            <a:r>
+              <a:rPr lang="ko-KR" altLang="en-US"/>
+              <a:t>네 번째 수준</a:t>
+            </a:r>
+          </a:p>
+          <a:p>
+            <a:pPr lvl="4"/>
+            <a:r>
+              <a:rPr lang="ko-KR" altLang="en-US"/>
+              <a:t>다섯 번째 수준</a:t>
+            </a:r>
+          </a:p>
+        </p:txBody>
+      </p:sp>
+      <p:sp>
+        <p:nvSpPr>
+          <p:cNvPr id="4" name="내용 개체 틀 3">
+            <a:extLst>
+              <a:ext uri="{FF2B5EF4-FFF2-40B4-BE49-F238E27FC236}">
+                <a16:creationId xmlns:a16="http://schemas.microsoft.com/office/drawing/2014/main" id="{4E92E260-5A60-3295-E36E-8B53C3B970FC}"/>
+              </a:ext>
+            </a:extLst>
+          </p:cNvPr>
+          <p:cNvSpPr>
+            <a:spLocks noGrp="1"/>
+          </p:cNvSpPr>
+          <p:nvPr>
+            <p:ph sz="half" idx="2"/>
+          </p:nvPr>
+        </p:nvSpPr>
+        <p:spPr>
+          <a:xfrm>
+            <a:off x="6172200" y="1825625"/>
+            <a:ext cx="5181600" cy="4351338"/>
+          </a:xfrm>
+        </p:spPr>
+        <p:txBody>
+          <a:bodyPr/>
+          <a:lstStyle/>
+          <a:p>
+            <a:pPr lvl="0"/>
+            <a:r>
+              <a:rPr lang="ko-KR" altLang="en-US"/>
+              <a:t>마스터 텍스트 스타일을 편집하려면 클릭</a:t>
+            </a:r>
+          </a:p>
+          <a:p>
+            <a:pPr lvl="1"/>
+            <a:r>
+              <a:rPr lang="ko-KR" altLang="en-US"/>
+              <a:t>두 번째 수준</a:t>
+            </a:r>
+          </a:p>
+          <a:p>
+            <a:pPr lvl="2"/>
+            <a:r>
+              <a:rPr lang="ko-KR" altLang="en-US"/>
+              <a:t>세 번째 수준</a:t>
+            </a:r>
+          </a:p>
+          <a:p>
+            <a:pPr lvl="3"/>
+            <a:r>
+              <a:rPr lang="ko-KR" altLang="en-US"/>
+              <a:t>네 번째 수준</a:t>
+            </a:r>
+          </a:p>
+          <a:p>
+            <a:pPr lvl="4"/>
+            <a:r>
+              <a:rPr lang="ko-KR" altLang="en-US"/>
+              <a:t>다섯 번째 수준</a:t>
+            </a:r>
+          </a:p>
+        </p:txBody>
+      </p:sp>
+      <p:sp>
+        <p:nvSpPr>
+          <p:cNvPr id="5" name="날짜 개체 틀 4">
+            <a:extLst>
+              <a:ext uri="{FF2B5EF4-FFF2-40B4-BE49-F238E27FC236}">
+                <a16:creationId xmlns:a16="http://schemas.microsoft.com/office/drawing/2014/main" id="{0BA8ED4A-BC61-41F8-8C89-0ECE48B8E4BA}"/>
+              </a:ext>
+            </a:extLst>
+          </p:cNvPr>
+          <p:cNvSpPr>
+            <a:spLocks noGrp="1"/>
+          </p:cNvSpPr>
+          <p:nvPr>
+            <p:ph type="dt" sz="half" idx="10"/>
+          </p:nvPr>
+        </p:nvSpPr>
+        <p:spPr/>
+        <p:txBody>
+          <a:bodyPr/>
+          <a:lstStyle/>
+          <a:p>
+            <a:fld id="{995C7C8F-822A-4723-A724-B24BDCABEA27}" type="datetimeFigureOut">
+              <a:rPr lang="ko-KR" altLang="en-US" smtClean="0"/>
+              <a:t>2025-07-17</a:t>
+            </a:fld>
+            <a:endParaRPr lang="ko-KR" altLang="en-US"/>
+          </a:p>
+        </p:txBody>
+      </p:sp>
+      <p:sp>
+        <p:nvSpPr>
+          <p:cNvPr id="6" name="바닥글 개체 틀 5">
+            <a:extLst>
+              <a:ext uri="{FF2B5EF4-FFF2-40B4-BE49-F238E27FC236}">
+                <a16:creationId xmlns:a16="http://schemas.microsoft.com/office/drawing/2014/main" id="{5C8C01F0-E2BD-6512-0903-746A9C458521}"/>
+              </a:ext>
+            </a:extLst>
+          </p:cNvPr>
+          <p:cNvSpPr>
+            <a:spLocks noGrp="1"/>
+          </p:cNvSpPr>
+          <p:nvPr>
+            <p:ph type="ftr" sz="quarter" idx="11"/>
+          </p:nvPr>
+        </p:nvSpPr>
+        <p:spPr/>
+        <p:txBody>
+          <a:bodyPr/>
+          <a:lstStyle/>
+          <a:p>
+            <a:endParaRPr lang="ko-KR" altLang="en-US"/>
+          </a:p>
+        </p:txBody>
+      </p:sp>
+      <p:sp>
+        <p:nvSpPr>
+          <p:cNvPr id="7" name="슬라이드 번호 개체 틀 6">
+            <a:extLst>
+              <a:ext uri="{FF2B5EF4-FFF2-40B4-BE49-F238E27FC236}">
+                <a16:creationId xmlns:a16="http://schemas.microsoft.com/office/drawing/2014/main" id="{E2BDB509-000B-21BB-E6A4-324311AF2F74}"/>
+              </a:ext>
+            </a:extLst>
+          </p:cNvPr>
+          <p:cNvSpPr>
+            <a:spLocks noGrp="1"/>
+          </p:cNvSpPr>
+          <p:nvPr>
+            <p:ph type="sldNum" sz="quarter" idx="12"/>
+          </p:nvPr>
+        </p:nvSpPr>
+        <p:spPr/>
+        <p:txBody>
+          <a:bodyPr/>
+          <a:lstStyle/>
+          <a:p>
+            <a:fld id="{6F89A9E9-A8B1-4524-AE75-5A6692DCE9C4}" type="slidenum">
+              <a:rPr lang="ko-KR" altLang="en-US" smtClean="0"/>
+              <a:t>‹#›</a:t>
+            </a:fld>
+            <a:endParaRPr lang="ko-KR" altLang="en-US"/>
+          </a:p>
+        </p:txBody>
+      </p:sp>
+    </p:spTree>
+    <p:extLst>
+      <p:ext uri="{BB962C8B-B14F-4D97-AF65-F5344CB8AC3E}">
+        <p14:creationId xmlns:p14="http://schemas.microsoft.com/office/powerpoint/2010/main" val="1223830881"/>
+      </p:ext>
+    </p:extLst>
+  </p:cSld>
+  <p:clrMapOvr>
+    <a:masterClrMapping/>
+  </p:clrMapOvr>
+</p:sldLayout>
+</file>
+
+<file path=ppt/slideLayouts/slideLayout16.xml><?xml version="1.0" encoding="utf-8"?>
+<p:sldLayout xmlns:a="http://schemas.openxmlformats.org/drawingml/2006/main" xmlns:r="http://schemas.openxmlformats.org/officeDocument/2006/relationships" xmlns:p="http://schemas.openxmlformats.org/presentationml/2006/main" type="twoTxTwoObj" preserve="1">
+  <p:cSld name="비교">
+    <p:spTree>
+      <p:nvGrpSpPr>
+        <p:cNvPr id="1" name=""/>
+        <p:cNvGrpSpPr/>
+        <p:nvPr/>
+      </p:nvGrpSpPr>
+      <p:grpSpPr>
+        <a:xfrm>
+          <a:off x="0" y="0"/>
+          <a:ext cx="0" cy="0"/>
+          <a:chOff x="0" y="0"/>
+          <a:chExt cx="0" cy="0"/>
+        </a:xfrm>
+      </p:grpSpPr>
+      <p:sp>
+        <p:nvSpPr>
+          <p:cNvPr id="2" name="제목 1">
+            <a:extLst>
+              <a:ext uri="{FF2B5EF4-FFF2-40B4-BE49-F238E27FC236}">
+                <a16:creationId xmlns:a16="http://schemas.microsoft.com/office/drawing/2014/main" id="{D13D10C5-0F54-246A-C183-8C9E045C012A}"/>
+              </a:ext>
+            </a:extLst>
+          </p:cNvPr>
+          <p:cNvSpPr>
+            <a:spLocks noGrp="1"/>
+          </p:cNvSpPr>
+          <p:nvPr>
+            <p:ph type="title"/>
+          </p:nvPr>
+        </p:nvSpPr>
+        <p:spPr>
+          <a:xfrm>
+            <a:off x="839788" y="365125"/>
+            <a:ext cx="10515600" cy="1325563"/>
+          </a:xfrm>
+        </p:spPr>
+        <p:txBody>
+          <a:bodyPr/>
+          <a:lstStyle/>
+          <a:p>
+            <a:r>
+              <a:rPr lang="ko-KR" altLang="en-US"/>
+              <a:t>마스터 제목 스타일 편집</a:t>
+            </a:r>
+          </a:p>
+        </p:txBody>
+      </p:sp>
+      <p:sp>
+        <p:nvSpPr>
+          <p:cNvPr id="3" name="텍스트 개체 틀 2">
+            <a:extLst>
+              <a:ext uri="{FF2B5EF4-FFF2-40B4-BE49-F238E27FC236}">
+                <a16:creationId xmlns:a16="http://schemas.microsoft.com/office/drawing/2014/main" id="{864E18FD-30CD-1B58-68BE-EBA22212767F}"/>
+              </a:ext>
+            </a:extLst>
+          </p:cNvPr>
+          <p:cNvSpPr>
+            <a:spLocks noGrp="1"/>
+          </p:cNvSpPr>
+          <p:nvPr>
+            <p:ph type="body" idx="1"/>
+          </p:nvPr>
+        </p:nvSpPr>
+        <p:spPr>
+          <a:xfrm>
+            <a:off x="839788" y="1681163"/>
+            <a:ext cx="5157787" cy="823912"/>
+          </a:xfrm>
+        </p:spPr>
+        <p:txBody>
+          <a:bodyPr anchor="b"/>
+          <a:lstStyle>
+            <a:lvl1pPr marL="0" indent="0">
+              <a:buNone/>
+              <a:defRPr sz="2400" b="1"/>
+            </a:lvl1pPr>
+            <a:lvl2pPr marL="457200" indent="0">
+              <a:buNone/>
+              <a:defRPr sz="2000" b="1"/>
+            </a:lvl2pPr>
+            <a:lvl3pPr marL="914400" indent="0">
+              <a:buNone/>
+              <a:defRPr sz="1800" b="1"/>
+            </a:lvl3pPr>
+            <a:lvl4pPr marL="1371600" indent="0">
+              <a:buNone/>
+              <a:defRPr sz="1600" b="1"/>
+            </a:lvl4pPr>
+            <a:lvl5pPr marL="1828800" indent="0">
+              <a:buNone/>
+              <a:defRPr sz="1600" b="1"/>
+            </a:lvl5pPr>
+            <a:lvl6pPr marL="2286000" indent="0">
+              <a:buNone/>
+              <a:defRPr sz="1600" b="1"/>
+            </a:lvl6pPr>
+            <a:lvl7pPr marL="2743200" indent="0">
+              <a:buNone/>
+              <a:defRPr sz="1600" b="1"/>
+            </a:lvl7pPr>
+            <a:lvl8pPr marL="3200400" indent="0">
+              <a:buNone/>
+              <a:defRPr sz="1600" b="1"/>
+            </a:lvl8pPr>
+            <a:lvl9pPr marL="3657600" indent="0">
+              <a:buNone/>
+              <a:defRPr sz="1600" b="1"/>
+            </a:lvl9pPr>
+          </a:lstStyle>
+          <a:p>
+            <a:pPr lvl="0"/>
+            <a:r>
+              <a:rPr lang="ko-KR" altLang="en-US"/>
+              <a:t>마스터 텍스트 스타일을 편집하려면 클릭</a:t>
+            </a:r>
+          </a:p>
+        </p:txBody>
+      </p:sp>
+      <p:sp>
+        <p:nvSpPr>
+          <p:cNvPr id="4" name="내용 개체 틀 3">
+            <a:extLst>
+              <a:ext uri="{FF2B5EF4-FFF2-40B4-BE49-F238E27FC236}">
+                <a16:creationId xmlns:a16="http://schemas.microsoft.com/office/drawing/2014/main" id="{7815BB73-A4F7-40F0-4482-CEBF8DAB699A}"/>
+              </a:ext>
+            </a:extLst>
+          </p:cNvPr>
+          <p:cNvSpPr>
+            <a:spLocks noGrp="1"/>
+          </p:cNvSpPr>
+          <p:nvPr>
+            <p:ph sz="half" idx="2"/>
+          </p:nvPr>
+        </p:nvSpPr>
+        <p:spPr>
+          <a:xfrm>
+            <a:off x="839788" y="2505075"/>
+            <a:ext cx="5157787" cy="3684588"/>
+          </a:xfrm>
+        </p:spPr>
+        <p:txBody>
+          <a:bodyPr/>
+          <a:lstStyle/>
+          <a:p>
+            <a:pPr lvl="0"/>
+            <a:r>
+              <a:rPr lang="ko-KR" altLang="en-US"/>
+              <a:t>마스터 텍스트 스타일을 편집하려면 클릭</a:t>
+            </a:r>
+          </a:p>
+          <a:p>
+            <a:pPr lvl="1"/>
+            <a:r>
+              <a:rPr lang="ko-KR" altLang="en-US"/>
+              <a:t>두 번째 수준</a:t>
+            </a:r>
+          </a:p>
+          <a:p>
+            <a:pPr lvl="2"/>
+            <a:r>
+              <a:rPr lang="ko-KR" altLang="en-US"/>
+              <a:t>세 번째 수준</a:t>
+            </a:r>
+          </a:p>
+          <a:p>
+            <a:pPr lvl="3"/>
+            <a:r>
+              <a:rPr lang="ko-KR" altLang="en-US"/>
+              <a:t>네 번째 수준</a:t>
+            </a:r>
+          </a:p>
+          <a:p>
+            <a:pPr lvl="4"/>
+            <a:r>
+              <a:rPr lang="ko-KR" altLang="en-US"/>
+              <a:t>다섯 번째 수준</a:t>
+            </a:r>
+          </a:p>
+        </p:txBody>
+      </p:sp>
+      <p:sp>
+        <p:nvSpPr>
+          <p:cNvPr id="5" name="텍스트 개체 틀 4">
+            <a:extLst>
+              <a:ext uri="{FF2B5EF4-FFF2-40B4-BE49-F238E27FC236}">
+                <a16:creationId xmlns:a16="http://schemas.microsoft.com/office/drawing/2014/main" id="{145B7473-11FA-87F9-ACC6-2FDBCC5C8DE0}"/>
+              </a:ext>
+            </a:extLst>
+          </p:cNvPr>
+          <p:cNvSpPr>
+            <a:spLocks noGrp="1"/>
+          </p:cNvSpPr>
+          <p:nvPr>
+            <p:ph type="body" sz="quarter" idx="3"/>
+          </p:nvPr>
+        </p:nvSpPr>
+        <p:spPr>
+          <a:xfrm>
+            <a:off x="6172200" y="1681163"/>
+            <a:ext cx="5183188" cy="823912"/>
+          </a:xfrm>
+        </p:spPr>
+        <p:txBody>
+          <a:bodyPr anchor="b"/>
+          <a:lstStyle>
+            <a:lvl1pPr marL="0" indent="0">
+              <a:buNone/>
+              <a:defRPr sz="2400" b="1"/>
+            </a:lvl1pPr>
+            <a:lvl2pPr marL="457200" indent="0">
+              <a:buNone/>
+              <a:defRPr sz="2000" b="1"/>
+            </a:lvl2pPr>
+            <a:lvl3pPr marL="914400" indent="0">
+              <a:buNone/>
+              <a:defRPr sz="1800" b="1"/>
+            </a:lvl3pPr>
+            <a:lvl4pPr marL="1371600" indent="0">
+              <a:buNone/>
+              <a:defRPr sz="1600" b="1"/>
+            </a:lvl4pPr>
+            <a:lvl5pPr marL="1828800" indent="0">
+              <a:buNone/>
+              <a:defRPr sz="1600" b="1"/>
+            </a:lvl5pPr>
+            <a:lvl6pPr marL="2286000" indent="0">
+              <a:buNone/>
+              <a:defRPr sz="1600" b="1"/>
+            </a:lvl6pPr>
+            <a:lvl7pPr marL="2743200" indent="0">
+              <a:buNone/>
+              <a:defRPr sz="1600" b="1"/>
+            </a:lvl7pPr>
+            <a:lvl8pPr marL="3200400" indent="0">
+              <a:buNone/>
+              <a:defRPr sz="1600" b="1"/>
+            </a:lvl8pPr>
+            <a:lvl9pPr marL="3657600" indent="0">
+              <a:buNone/>
+              <a:defRPr sz="1600" b="1"/>
+            </a:lvl9pPr>
+          </a:lstStyle>
+          <a:p>
+            <a:pPr lvl="0"/>
+            <a:r>
+              <a:rPr lang="ko-KR" altLang="en-US"/>
+              <a:t>마스터 텍스트 스타일을 편집하려면 클릭</a:t>
+            </a:r>
+          </a:p>
+        </p:txBody>
+      </p:sp>
+      <p:sp>
+        <p:nvSpPr>
+          <p:cNvPr id="6" name="내용 개체 틀 5">
+            <a:extLst>
+              <a:ext uri="{FF2B5EF4-FFF2-40B4-BE49-F238E27FC236}">
+                <a16:creationId xmlns:a16="http://schemas.microsoft.com/office/drawing/2014/main" id="{B6BFD4DB-FF59-1274-2205-C8399B4E294E}"/>
+              </a:ext>
+            </a:extLst>
+          </p:cNvPr>
+          <p:cNvSpPr>
+            <a:spLocks noGrp="1"/>
+          </p:cNvSpPr>
+          <p:nvPr>
+            <p:ph sz="quarter" idx="4"/>
+          </p:nvPr>
+        </p:nvSpPr>
+        <p:spPr>
+          <a:xfrm>
+            <a:off x="6172200" y="2505075"/>
+            <a:ext cx="5183188" cy="3684588"/>
+          </a:xfrm>
+        </p:spPr>
+        <p:txBody>
+          <a:bodyPr/>
+          <a:lstStyle/>
+          <a:p>
+            <a:pPr lvl="0"/>
+            <a:r>
+              <a:rPr lang="ko-KR" altLang="en-US"/>
+              <a:t>마스터 텍스트 스타일을 편집하려면 클릭</a:t>
+            </a:r>
+          </a:p>
+          <a:p>
+            <a:pPr lvl="1"/>
+            <a:r>
+              <a:rPr lang="ko-KR" altLang="en-US"/>
+              <a:t>두 번째 수준</a:t>
+            </a:r>
+          </a:p>
+          <a:p>
+            <a:pPr lvl="2"/>
+            <a:r>
+              <a:rPr lang="ko-KR" altLang="en-US"/>
+              <a:t>세 번째 수준</a:t>
+            </a:r>
+          </a:p>
+          <a:p>
+            <a:pPr lvl="3"/>
+            <a:r>
+              <a:rPr lang="ko-KR" altLang="en-US"/>
+              <a:t>네 번째 수준</a:t>
+            </a:r>
+          </a:p>
+          <a:p>
+            <a:pPr lvl="4"/>
+            <a:r>
+              <a:rPr lang="ko-KR" altLang="en-US"/>
+              <a:t>다섯 번째 수준</a:t>
+            </a:r>
+          </a:p>
+        </p:txBody>
+      </p:sp>
+      <p:sp>
+        <p:nvSpPr>
+          <p:cNvPr id="7" name="날짜 개체 틀 6">
+            <a:extLst>
+              <a:ext uri="{FF2B5EF4-FFF2-40B4-BE49-F238E27FC236}">
+                <a16:creationId xmlns:a16="http://schemas.microsoft.com/office/drawing/2014/main" id="{BD6F039F-54D9-F611-6B40-B5EE8A67F4EB}"/>
+              </a:ext>
+            </a:extLst>
+          </p:cNvPr>
+          <p:cNvSpPr>
+            <a:spLocks noGrp="1"/>
+          </p:cNvSpPr>
+          <p:nvPr>
+            <p:ph type="dt" sz="half" idx="10"/>
+          </p:nvPr>
+        </p:nvSpPr>
+        <p:spPr/>
+        <p:txBody>
+          <a:bodyPr/>
+          <a:lstStyle/>
+          <a:p>
+            <a:fld id="{995C7C8F-822A-4723-A724-B24BDCABEA27}" type="datetimeFigureOut">
+              <a:rPr lang="ko-KR" altLang="en-US" smtClean="0"/>
+              <a:t>2025-07-17</a:t>
+            </a:fld>
+            <a:endParaRPr lang="ko-KR" altLang="en-US"/>
+          </a:p>
+        </p:txBody>
+      </p:sp>
+      <p:sp>
+        <p:nvSpPr>
+          <p:cNvPr id="8" name="바닥글 개체 틀 7">
+            <a:extLst>
+              <a:ext uri="{FF2B5EF4-FFF2-40B4-BE49-F238E27FC236}">
+                <a16:creationId xmlns:a16="http://schemas.microsoft.com/office/drawing/2014/main" id="{518E3818-D680-2703-E747-1AAE07B05AB8}"/>
+              </a:ext>
+            </a:extLst>
+          </p:cNvPr>
+          <p:cNvSpPr>
+            <a:spLocks noGrp="1"/>
+          </p:cNvSpPr>
+          <p:nvPr>
+            <p:ph type="ftr" sz="quarter" idx="11"/>
+          </p:nvPr>
+        </p:nvSpPr>
+        <p:spPr/>
+        <p:txBody>
+          <a:bodyPr/>
+          <a:lstStyle/>
+          <a:p>
+            <a:endParaRPr lang="ko-KR" altLang="en-US"/>
+          </a:p>
+        </p:txBody>
+      </p:sp>
+      <p:sp>
+        <p:nvSpPr>
+          <p:cNvPr id="9" name="슬라이드 번호 개체 틀 8">
+            <a:extLst>
+              <a:ext uri="{FF2B5EF4-FFF2-40B4-BE49-F238E27FC236}">
+                <a16:creationId xmlns:a16="http://schemas.microsoft.com/office/drawing/2014/main" id="{079A6F54-36C3-1453-DB13-33B6D191E2B6}"/>
+              </a:ext>
+            </a:extLst>
+          </p:cNvPr>
+          <p:cNvSpPr>
+            <a:spLocks noGrp="1"/>
+          </p:cNvSpPr>
+          <p:nvPr>
+            <p:ph type="sldNum" sz="quarter" idx="12"/>
+          </p:nvPr>
+        </p:nvSpPr>
+        <p:spPr/>
+        <p:txBody>
+          <a:bodyPr/>
+          <a:lstStyle/>
+          <a:p>
+            <a:fld id="{6F89A9E9-A8B1-4524-AE75-5A6692DCE9C4}" type="slidenum">
+              <a:rPr lang="ko-KR" altLang="en-US" smtClean="0"/>
+              <a:t>‹#›</a:t>
+            </a:fld>
+            <a:endParaRPr lang="ko-KR" altLang="en-US"/>
+          </a:p>
+        </p:txBody>
+      </p:sp>
+    </p:spTree>
+    <p:extLst>
+      <p:ext uri="{BB962C8B-B14F-4D97-AF65-F5344CB8AC3E}">
+        <p14:creationId xmlns:p14="http://schemas.microsoft.com/office/powerpoint/2010/main" val="950015994"/>
+      </p:ext>
+    </p:extLst>
+  </p:cSld>
+  <p:clrMapOvr>
+    <a:masterClrMapping/>
+  </p:clrMapOvr>
+</p:sldLayout>
+</file>
+
+<file path=ppt/slideLayouts/slideLayout17.xml><?xml version="1.0" encoding="utf-8"?>
+<p:sldLayout xmlns:a="http://schemas.openxmlformats.org/drawingml/2006/main" xmlns:r="http://schemas.openxmlformats.org/officeDocument/2006/relationships" xmlns:p="http://schemas.openxmlformats.org/presentationml/2006/main" type="titleOnly" preserve="1">
+  <p:cSld name="제목만">
+    <p:spTree>
+      <p:nvGrpSpPr>
+        <p:cNvPr id="1" name=""/>
+        <p:cNvGrpSpPr/>
+        <p:nvPr/>
+      </p:nvGrpSpPr>
+      <p:grpSpPr>
+        <a:xfrm>
+          <a:off x="0" y="0"/>
+          <a:ext cx="0" cy="0"/>
+          <a:chOff x="0" y="0"/>
+          <a:chExt cx="0" cy="0"/>
+        </a:xfrm>
+      </p:grpSpPr>
+      <p:sp>
+        <p:nvSpPr>
+          <p:cNvPr id="2" name="제목 1">
+            <a:extLst>
+              <a:ext uri="{FF2B5EF4-FFF2-40B4-BE49-F238E27FC236}">
+                <a16:creationId xmlns:a16="http://schemas.microsoft.com/office/drawing/2014/main" id="{80CCE3CD-01CD-DB07-9DEA-F789F555975B}"/>
+              </a:ext>
+            </a:extLst>
+          </p:cNvPr>
+          <p:cNvSpPr>
+            <a:spLocks noGrp="1"/>
+          </p:cNvSpPr>
+          <p:nvPr>
+            <p:ph type="title"/>
+          </p:nvPr>
+        </p:nvSpPr>
+        <p:spPr/>
+        <p:txBody>
+          <a:bodyPr/>
+          <a:lstStyle/>
+          <a:p>
+            <a:r>
+              <a:rPr lang="ko-KR" altLang="en-US"/>
+              <a:t>마스터 제목 스타일 편집</a:t>
+            </a:r>
+          </a:p>
+        </p:txBody>
+      </p:sp>
+      <p:sp>
+        <p:nvSpPr>
+          <p:cNvPr id="3" name="날짜 개체 틀 2">
+            <a:extLst>
+              <a:ext uri="{FF2B5EF4-FFF2-40B4-BE49-F238E27FC236}">
+                <a16:creationId xmlns:a16="http://schemas.microsoft.com/office/drawing/2014/main" id="{1D218139-0BD9-7E65-ED9B-3B55F652162D}"/>
+              </a:ext>
+            </a:extLst>
+          </p:cNvPr>
+          <p:cNvSpPr>
+            <a:spLocks noGrp="1"/>
+          </p:cNvSpPr>
+          <p:nvPr>
+            <p:ph type="dt" sz="half" idx="10"/>
+          </p:nvPr>
+        </p:nvSpPr>
+        <p:spPr/>
+        <p:txBody>
+          <a:bodyPr/>
+          <a:lstStyle/>
+          <a:p>
+            <a:fld id="{995C7C8F-822A-4723-A724-B24BDCABEA27}" type="datetimeFigureOut">
+              <a:rPr lang="ko-KR" altLang="en-US" smtClean="0"/>
+              <a:t>2025-07-17</a:t>
+            </a:fld>
+            <a:endParaRPr lang="ko-KR" altLang="en-US"/>
+          </a:p>
+        </p:txBody>
+      </p:sp>
+      <p:sp>
+        <p:nvSpPr>
+          <p:cNvPr id="4" name="바닥글 개체 틀 3">
+            <a:extLst>
+              <a:ext uri="{FF2B5EF4-FFF2-40B4-BE49-F238E27FC236}">
+                <a16:creationId xmlns:a16="http://schemas.microsoft.com/office/drawing/2014/main" id="{7C041A41-E2E0-042A-9A60-9EB1D2A8E1BF}"/>
+              </a:ext>
+            </a:extLst>
+          </p:cNvPr>
+          <p:cNvSpPr>
+            <a:spLocks noGrp="1"/>
+          </p:cNvSpPr>
+          <p:nvPr>
+            <p:ph type="ftr" sz="quarter" idx="11"/>
+          </p:nvPr>
+        </p:nvSpPr>
+        <p:spPr/>
+        <p:txBody>
+          <a:bodyPr/>
+          <a:lstStyle/>
+          <a:p>
+            <a:endParaRPr lang="ko-KR" altLang="en-US"/>
+          </a:p>
+        </p:txBody>
+      </p:sp>
+      <p:sp>
+        <p:nvSpPr>
+          <p:cNvPr id="5" name="슬라이드 번호 개체 틀 4">
+            <a:extLst>
+              <a:ext uri="{FF2B5EF4-FFF2-40B4-BE49-F238E27FC236}">
+                <a16:creationId xmlns:a16="http://schemas.microsoft.com/office/drawing/2014/main" id="{EBED3BCB-F012-DAED-7929-DFF86082A9F0}"/>
+              </a:ext>
+            </a:extLst>
+          </p:cNvPr>
+          <p:cNvSpPr>
+            <a:spLocks noGrp="1"/>
+          </p:cNvSpPr>
+          <p:nvPr>
+            <p:ph type="sldNum" sz="quarter" idx="12"/>
+          </p:nvPr>
+        </p:nvSpPr>
+        <p:spPr/>
+        <p:txBody>
+          <a:bodyPr/>
+          <a:lstStyle/>
+          <a:p>
+            <a:fld id="{6F89A9E9-A8B1-4524-AE75-5A6692DCE9C4}" type="slidenum">
+              <a:rPr lang="ko-KR" altLang="en-US" smtClean="0"/>
+              <a:t>‹#›</a:t>
+            </a:fld>
+            <a:endParaRPr lang="ko-KR" altLang="en-US"/>
+          </a:p>
+        </p:txBody>
+      </p:sp>
+    </p:spTree>
+    <p:extLst>
+      <p:ext uri="{BB962C8B-B14F-4D97-AF65-F5344CB8AC3E}">
+        <p14:creationId xmlns:p14="http://schemas.microsoft.com/office/powerpoint/2010/main" val="3815079387"/>
+      </p:ext>
+    </p:extLst>
+  </p:cSld>
+  <p:clrMapOvr>
+    <a:masterClrMapping/>
+  </p:clrMapOvr>
+</p:sldLayout>
+</file>
+
+<file path=ppt/slideLayouts/slideLayout18.xml><?xml version="1.0" encoding="utf-8"?>
+<p:sldLayout xmlns:a="http://schemas.openxmlformats.org/drawingml/2006/main" xmlns:r="http://schemas.openxmlformats.org/officeDocument/2006/relationships" xmlns:p="http://schemas.openxmlformats.org/presentationml/2006/main" type="blank" preserve="1">
+  <p:cSld name="빈 화면">
+    <p:spTree>
+      <p:nvGrpSpPr>
+        <p:cNvPr id="1" name=""/>
+        <p:cNvGrpSpPr/>
+        <p:nvPr/>
+      </p:nvGrpSpPr>
+      <p:grpSpPr>
+        <a:xfrm>
+          <a:off x="0" y="0"/>
+          <a:ext cx="0" cy="0"/>
+          <a:chOff x="0" y="0"/>
+          <a:chExt cx="0" cy="0"/>
+        </a:xfrm>
+      </p:grpSpPr>
+      <p:sp>
+        <p:nvSpPr>
+          <p:cNvPr id="2" name="날짜 개체 틀 1">
+            <a:extLst>
+              <a:ext uri="{FF2B5EF4-FFF2-40B4-BE49-F238E27FC236}">
+                <a16:creationId xmlns:a16="http://schemas.microsoft.com/office/drawing/2014/main" id="{2F58533F-4E19-A61B-1CC3-1B37414C54F1}"/>
+              </a:ext>
+            </a:extLst>
+          </p:cNvPr>
+          <p:cNvSpPr>
+            <a:spLocks noGrp="1"/>
+          </p:cNvSpPr>
+          <p:nvPr>
+            <p:ph type="dt" sz="half" idx="10"/>
+          </p:nvPr>
+        </p:nvSpPr>
+        <p:spPr/>
+        <p:txBody>
+          <a:bodyPr/>
+          <a:lstStyle/>
+          <a:p>
+            <a:fld id="{995C7C8F-822A-4723-A724-B24BDCABEA27}" type="datetimeFigureOut">
+              <a:rPr lang="ko-KR" altLang="en-US" smtClean="0"/>
+              <a:t>2025-07-17</a:t>
+            </a:fld>
+            <a:endParaRPr lang="ko-KR" altLang="en-US"/>
+          </a:p>
+        </p:txBody>
+      </p:sp>
+      <p:sp>
+        <p:nvSpPr>
+          <p:cNvPr id="3" name="바닥글 개체 틀 2">
+            <a:extLst>
+              <a:ext uri="{FF2B5EF4-FFF2-40B4-BE49-F238E27FC236}">
+                <a16:creationId xmlns:a16="http://schemas.microsoft.com/office/drawing/2014/main" id="{64448466-3913-A76F-4B93-9DD2AF260426}"/>
+              </a:ext>
+            </a:extLst>
+          </p:cNvPr>
+          <p:cNvSpPr>
+            <a:spLocks noGrp="1"/>
+          </p:cNvSpPr>
+          <p:nvPr>
+            <p:ph type="ftr" sz="quarter" idx="11"/>
+          </p:nvPr>
+        </p:nvSpPr>
+        <p:spPr/>
+        <p:txBody>
+          <a:bodyPr/>
+          <a:lstStyle/>
+          <a:p>
+            <a:endParaRPr lang="ko-KR" altLang="en-US"/>
+          </a:p>
+        </p:txBody>
+      </p:sp>
+      <p:sp>
+        <p:nvSpPr>
+          <p:cNvPr id="4" name="슬라이드 번호 개체 틀 3">
+            <a:extLst>
+              <a:ext uri="{FF2B5EF4-FFF2-40B4-BE49-F238E27FC236}">
+                <a16:creationId xmlns:a16="http://schemas.microsoft.com/office/drawing/2014/main" id="{B5DDFE27-651A-F79B-FC02-A7B396A4EBD8}"/>
+              </a:ext>
+            </a:extLst>
+          </p:cNvPr>
+          <p:cNvSpPr>
+            <a:spLocks noGrp="1"/>
+          </p:cNvSpPr>
+          <p:nvPr>
+            <p:ph type="sldNum" sz="quarter" idx="12"/>
+          </p:nvPr>
+        </p:nvSpPr>
+        <p:spPr/>
+        <p:txBody>
+          <a:bodyPr/>
+          <a:lstStyle/>
+          <a:p>
+            <a:fld id="{6F89A9E9-A8B1-4524-AE75-5A6692DCE9C4}" type="slidenum">
+              <a:rPr lang="ko-KR" altLang="en-US" smtClean="0"/>
+              <a:t>‹#›</a:t>
+            </a:fld>
+            <a:endParaRPr lang="ko-KR" altLang="en-US"/>
+          </a:p>
+        </p:txBody>
+      </p:sp>
+    </p:spTree>
+    <p:extLst>
+      <p:ext uri="{BB962C8B-B14F-4D97-AF65-F5344CB8AC3E}">
+        <p14:creationId xmlns:p14="http://schemas.microsoft.com/office/powerpoint/2010/main" val="2217465082"/>
+      </p:ext>
+    </p:extLst>
+  </p:cSld>
+  <p:clrMapOvr>
+    <a:masterClrMapping/>
+  </p:clrMapOvr>
+</p:sldLayout>
+</file>
+
+<file path=ppt/slideLayouts/slideLayout19.xml><?xml version="1.0" encoding="utf-8"?>
+<p:sldLayout xmlns:a="http://schemas.openxmlformats.org/drawingml/2006/main" xmlns:r="http://schemas.openxmlformats.org/officeDocument/2006/relationships" xmlns:p="http://schemas.openxmlformats.org/presentationml/2006/main" type="objTx" preserve="1">
+  <p:cSld name="캡션 있는 콘텐츠">
+    <p:spTree>
+      <p:nvGrpSpPr>
+        <p:cNvPr id="1" name=""/>
+        <p:cNvGrpSpPr/>
+        <p:nvPr/>
+      </p:nvGrpSpPr>
+      <p:grpSpPr>
+        <a:xfrm>
+          <a:off x="0" y="0"/>
+          <a:ext cx="0" cy="0"/>
+          <a:chOff x="0" y="0"/>
+          <a:chExt cx="0" cy="0"/>
+        </a:xfrm>
+      </p:grpSpPr>
+      <p:sp>
+        <p:nvSpPr>
+          <p:cNvPr id="2" name="제목 1">
+            <a:extLst>
+              <a:ext uri="{FF2B5EF4-FFF2-40B4-BE49-F238E27FC236}">
+                <a16:creationId xmlns:a16="http://schemas.microsoft.com/office/drawing/2014/main" id="{2272BCC7-251F-BFEF-C42C-966DFBB6F1FE}"/>
+              </a:ext>
+            </a:extLst>
+          </p:cNvPr>
+          <p:cNvSpPr>
+            <a:spLocks noGrp="1"/>
+          </p:cNvSpPr>
+          <p:nvPr>
+            <p:ph type="title"/>
+          </p:nvPr>
+        </p:nvSpPr>
+        <p:spPr>
+          <a:xfrm>
+            <a:off x="839788" y="457200"/>
+            <a:ext cx="3932237" cy="1600200"/>
+          </a:xfrm>
+        </p:spPr>
+        <p:txBody>
+          <a:bodyPr anchor="b"/>
+          <a:lstStyle>
+            <a:lvl1pPr>
+              <a:defRPr sz="3200"/>
+            </a:lvl1pPr>
+          </a:lstStyle>
+          <a:p>
+            <a:r>
+              <a:rPr lang="ko-KR" altLang="en-US"/>
+              <a:t>마스터 제목 스타일 편집</a:t>
+            </a:r>
+          </a:p>
+        </p:txBody>
+      </p:sp>
+      <p:sp>
+        <p:nvSpPr>
+          <p:cNvPr id="3" name="내용 개체 틀 2">
+            <a:extLst>
+              <a:ext uri="{FF2B5EF4-FFF2-40B4-BE49-F238E27FC236}">
+                <a16:creationId xmlns:a16="http://schemas.microsoft.com/office/drawing/2014/main" id="{5C827EB3-E789-C5C3-9AE8-FE01C486B029}"/>
+              </a:ext>
+            </a:extLst>
+          </p:cNvPr>
+          <p:cNvSpPr>
+            <a:spLocks noGrp="1"/>
+          </p:cNvSpPr>
+          <p:nvPr>
+            <p:ph idx="1"/>
+          </p:nvPr>
+        </p:nvSpPr>
+        <p:spPr>
+          <a:xfrm>
+            <a:off x="5183188" y="987425"/>
+            <a:ext cx="6172200" cy="4873625"/>
+          </a:xfrm>
+        </p:spPr>
+        <p:txBody>
+          <a:bodyPr/>
+          <a:lstStyle>
+            <a:lvl1pPr>
+              <a:defRPr sz="3200"/>
+            </a:lvl1pPr>
+            <a:lvl2pPr>
+              <a:defRPr sz="2800"/>
+            </a:lvl2pPr>
+            <a:lvl3pPr>
+              <a:defRPr sz="2400"/>
+            </a:lvl3pPr>
+            <a:lvl4pPr>
+              <a:defRPr sz="2000"/>
+            </a:lvl4pPr>
+            <a:lvl5pPr>
+              <a:defRPr sz="2000"/>
+            </a:lvl5pPr>
+            <a:lvl6pPr>
+              <a:defRPr sz="2000"/>
+            </a:lvl6pPr>
+            <a:lvl7pPr>
+              <a:defRPr sz="2000"/>
+            </a:lvl7pPr>
+            <a:lvl8pPr>
+              <a:defRPr sz="2000"/>
+            </a:lvl8pPr>
+            <a:lvl9pPr>
+              <a:defRPr sz="2000"/>
+            </a:lvl9pPr>
+          </a:lstStyle>
+          <a:p>
+            <a:pPr lvl="0"/>
+            <a:r>
+              <a:rPr lang="ko-KR" altLang="en-US"/>
+              <a:t>마스터 텍스트 스타일을 편집하려면 클릭</a:t>
+            </a:r>
+          </a:p>
+          <a:p>
+            <a:pPr lvl="1"/>
+            <a:r>
+              <a:rPr lang="ko-KR" altLang="en-US"/>
+              <a:t>두 번째 수준</a:t>
+            </a:r>
+          </a:p>
+          <a:p>
+            <a:pPr lvl="2"/>
+            <a:r>
+              <a:rPr lang="ko-KR" altLang="en-US"/>
+              <a:t>세 번째 수준</a:t>
+            </a:r>
+          </a:p>
+          <a:p>
+            <a:pPr lvl="3"/>
+            <a:r>
+              <a:rPr lang="ko-KR" altLang="en-US"/>
+              <a:t>네 번째 수준</a:t>
+            </a:r>
+          </a:p>
+          <a:p>
+            <a:pPr lvl="4"/>
+            <a:r>
+              <a:rPr lang="ko-KR" altLang="en-US"/>
+              <a:t>다섯 번째 수준</a:t>
+            </a:r>
+          </a:p>
+        </p:txBody>
+      </p:sp>
+      <p:sp>
+        <p:nvSpPr>
+          <p:cNvPr id="4" name="텍스트 개체 틀 3">
+            <a:extLst>
+              <a:ext uri="{FF2B5EF4-FFF2-40B4-BE49-F238E27FC236}">
+                <a16:creationId xmlns:a16="http://schemas.microsoft.com/office/drawing/2014/main" id="{631CE4BD-5D63-8E39-644D-9D1DB57D1174}"/>
+              </a:ext>
+            </a:extLst>
+          </p:cNvPr>
+          <p:cNvSpPr>
+            <a:spLocks noGrp="1"/>
+          </p:cNvSpPr>
+          <p:nvPr>
+            <p:ph type="body" sz="half" idx="2"/>
+          </p:nvPr>
+        </p:nvSpPr>
+        <p:spPr>
+          <a:xfrm>
+            <a:off x="839788" y="2057400"/>
+            <a:ext cx="3932237" cy="3811588"/>
+          </a:xfrm>
+        </p:spPr>
+        <p:txBody>
+          <a:bodyPr/>
+          <a:lstStyle>
+            <a:lvl1pPr marL="0" indent="0">
+              <a:buNone/>
+              <a:defRPr sz="1600"/>
+            </a:lvl1pPr>
+            <a:lvl2pPr marL="457200" indent="0">
+              <a:buNone/>
+              <a:defRPr sz="1400"/>
+            </a:lvl2pPr>
+            <a:lvl3pPr marL="914400" indent="0">
+              <a:buNone/>
+              <a:defRPr sz="1200"/>
+            </a:lvl3pPr>
+            <a:lvl4pPr marL="1371600" indent="0">
+              <a:buNone/>
+              <a:defRPr sz="1000"/>
+            </a:lvl4pPr>
+            <a:lvl5pPr marL="1828800" indent="0">
+              <a:buNone/>
+              <a:defRPr sz="1000"/>
+            </a:lvl5pPr>
+            <a:lvl6pPr marL="2286000" indent="0">
+              <a:buNone/>
+              <a:defRPr sz="1000"/>
+            </a:lvl6pPr>
+            <a:lvl7pPr marL="2743200" indent="0">
+              <a:buNone/>
+              <a:defRPr sz="1000"/>
+            </a:lvl7pPr>
+            <a:lvl8pPr marL="3200400" indent="0">
+              <a:buNone/>
+              <a:defRPr sz="1000"/>
+            </a:lvl8pPr>
+            <a:lvl9pPr marL="3657600" indent="0">
+              <a:buNone/>
+              <a:defRPr sz="1000"/>
+            </a:lvl9pPr>
+          </a:lstStyle>
+          <a:p>
+            <a:pPr lvl="0"/>
+            <a:r>
+              <a:rPr lang="ko-KR" altLang="en-US"/>
+              <a:t>마스터 텍스트 스타일을 편집하려면 클릭</a:t>
+            </a:r>
+          </a:p>
+        </p:txBody>
+      </p:sp>
+      <p:sp>
+        <p:nvSpPr>
+          <p:cNvPr id="5" name="날짜 개체 틀 4">
+            <a:extLst>
+              <a:ext uri="{FF2B5EF4-FFF2-40B4-BE49-F238E27FC236}">
+                <a16:creationId xmlns:a16="http://schemas.microsoft.com/office/drawing/2014/main" id="{F6C75F8A-5A01-6328-30FE-507A41120CB0}"/>
+              </a:ext>
+            </a:extLst>
+          </p:cNvPr>
+          <p:cNvSpPr>
+            <a:spLocks noGrp="1"/>
+          </p:cNvSpPr>
+          <p:nvPr>
+            <p:ph type="dt" sz="half" idx="10"/>
+          </p:nvPr>
+        </p:nvSpPr>
+        <p:spPr/>
+        <p:txBody>
+          <a:bodyPr/>
+          <a:lstStyle/>
+          <a:p>
+            <a:fld id="{995C7C8F-822A-4723-A724-B24BDCABEA27}" type="datetimeFigureOut">
+              <a:rPr lang="ko-KR" altLang="en-US" smtClean="0"/>
+              <a:t>2025-07-17</a:t>
+            </a:fld>
+            <a:endParaRPr lang="ko-KR" altLang="en-US"/>
+          </a:p>
+        </p:txBody>
+      </p:sp>
+      <p:sp>
+        <p:nvSpPr>
+          <p:cNvPr id="6" name="바닥글 개체 틀 5">
+            <a:extLst>
+              <a:ext uri="{FF2B5EF4-FFF2-40B4-BE49-F238E27FC236}">
+                <a16:creationId xmlns:a16="http://schemas.microsoft.com/office/drawing/2014/main" id="{AACF5CFF-29CC-7405-2CC6-A5FFF975FBB9}"/>
+              </a:ext>
+            </a:extLst>
+          </p:cNvPr>
+          <p:cNvSpPr>
+            <a:spLocks noGrp="1"/>
+          </p:cNvSpPr>
+          <p:nvPr>
+            <p:ph type="ftr" sz="quarter" idx="11"/>
+          </p:nvPr>
+        </p:nvSpPr>
+        <p:spPr/>
+        <p:txBody>
+          <a:bodyPr/>
+          <a:lstStyle/>
+          <a:p>
+            <a:endParaRPr lang="ko-KR" altLang="en-US"/>
+          </a:p>
+        </p:txBody>
+      </p:sp>
+      <p:sp>
+        <p:nvSpPr>
+          <p:cNvPr id="7" name="슬라이드 번호 개체 틀 6">
+            <a:extLst>
+              <a:ext uri="{FF2B5EF4-FFF2-40B4-BE49-F238E27FC236}">
+                <a16:creationId xmlns:a16="http://schemas.microsoft.com/office/drawing/2014/main" id="{ECB070C8-BB54-84F9-44FD-C4988995B316}"/>
+              </a:ext>
+            </a:extLst>
+          </p:cNvPr>
+          <p:cNvSpPr>
+            <a:spLocks noGrp="1"/>
+          </p:cNvSpPr>
+          <p:nvPr>
+            <p:ph type="sldNum" sz="quarter" idx="12"/>
+          </p:nvPr>
+        </p:nvSpPr>
+        <p:spPr/>
+        <p:txBody>
+          <a:bodyPr/>
+          <a:lstStyle/>
+          <a:p>
+            <a:fld id="{6F89A9E9-A8B1-4524-AE75-5A6692DCE9C4}" type="slidenum">
+              <a:rPr lang="ko-KR" altLang="en-US" smtClean="0"/>
+              <a:t>‹#›</a:t>
+            </a:fld>
+            <a:endParaRPr lang="ko-KR" altLang="en-US"/>
+          </a:p>
+        </p:txBody>
+      </p:sp>
+    </p:spTree>
+    <p:extLst>
+      <p:ext uri="{BB962C8B-B14F-4D97-AF65-F5344CB8AC3E}">
+        <p14:creationId xmlns:p14="http://schemas.microsoft.com/office/powerpoint/2010/main" val="1262601009"/>
       </p:ext>
     </p:extLst>
   </p:cSld>
@@ -1383,7 +3319,7 @@
           <a:p>
             <a:fld id="{502CD248-AE16-47FA-AF5A-2F10FD8A8207}" type="datetimeFigureOut">
               <a:rPr lang="ko-KR" altLang="en-US" smtClean="0"/>
-              <a:t>2025-06-04</a:t>
+              <a:t>2025-07-17</a:t>
             </a:fld>
             <a:endParaRPr lang="ko-KR" altLang="en-US"/>
           </a:p>
@@ -1447,6 +3383,700 @@
     <p:extLst>
       <p:ext uri="{BB962C8B-B14F-4D97-AF65-F5344CB8AC3E}">
         <p14:creationId xmlns:p14="http://schemas.microsoft.com/office/powerpoint/2010/main" val="1743036898"/>
+      </p:ext>
+    </p:extLst>
+  </p:cSld>
+  <p:clrMapOvr>
+    <a:masterClrMapping/>
+  </p:clrMapOvr>
+</p:sldLayout>
+</file>
+
+<file path=ppt/slideLayouts/slideLayout20.xml><?xml version="1.0" encoding="utf-8"?>
+<p:sldLayout xmlns:a="http://schemas.openxmlformats.org/drawingml/2006/main" xmlns:r="http://schemas.openxmlformats.org/officeDocument/2006/relationships" xmlns:p="http://schemas.openxmlformats.org/presentationml/2006/main" type="picTx" preserve="1">
+  <p:cSld name="캡션 있는 그림">
+    <p:spTree>
+      <p:nvGrpSpPr>
+        <p:cNvPr id="1" name=""/>
+        <p:cNvGrpSpPr/>
+        <p:nvPr/>
+      </p:nvGrpSpPr>
+      <p:grpSpPr>
+        <a:xfrm>
+          <a:off x="0" y="0"/>
+          <a:ext cx="0" cy="0"/>
+          <a:chOff x="0" y="0"/>
+          <a:chExt cx="0" cy="0"/>
+        </a:xfrm>
+      </p:grpSpPr>
+      <p:sp>
+        <p:nvSpPr>
+          <p:cNvPr id="2" name="제목 1">
+            <a:extLst>
+              <a:ext uri="{FF2B5EF4-FFF2-40B4-BE49-F238E27FC236}">
+                <a16:creationId xmlns:a16="http://schemas.microsoft.com/office/drawing/2014/main" id="{F353E7F7-430E-DF29-A907-1E7278D9C427}"/>
+              </a:ext>
+            </a:extLst>
+          </p:cNvPr>
+          <p:cNvSpPr>
+            <a:spLocks noGrp="1"/>
+          </p:cNvSpPr>
+          <p:nvPr>
+            <p:ph type="title"/>
+          </p:nvPr>
+        </p:nvSpPr>
+        <p:spPr>
+          <a:xfrm>
+            <a:off x="839788" y="457200"/>
+            <a:ext cx="3932237" cy="1600200"/>
+          </a:xfrm>
+        </p:spPr>
+        <p:txBody>
+          <a:bodyPr anchor="b"/>
+          <a:lstStyle>
+            <a:lvl1pPr>
+              <a:defRPr sz="3200"/>
+            </a:lvl1pPr>
+          </a:lstStyle>
+          <a:p>
+            <a:r>
+              <a:rPr lang="ko-KR" altLang="en-US"/>
+              <a:t>마스터 제목 스타일 편집</a:t>
+            </a:r>
+          </a:p>
+        </p:txBody>
+      </p:sp>
+      <p:sp>
+        <p:nvSpPr>
+          <p:cNvPr id="3" name="그림 개체 틀 2">
+            <a:extLst>
+              <a:ext uri="{FF2B5EF4-FFF2-40B4-BE49-F238E27FC236}">
+                <a16:creationId xmlns:a16="http://schemas.microsoft.com/office/drawing/2014/main" id="{38D3ECFE-778E-FF6C-8566-585D48061A9F}"/>
+              </a:ext>
+            </a:extLst>
+          </p:cNvPr>
+          <p:cNvSpPr>
+            <a:spLocks noGrp="1"/>
+          </p:cNvSpPr>
+          <p:nvPr>
+            <p:ph type="pic" idx="1"/>
+          </p:nvPr>
+        </p:nvSpPr>
+        <p:spPr>
+          <a:xfrm>
+            <a:off x="5183188" y="987425"/>
+            <a:ext cx="6172200" cy="4873625"/>
+          </a:xfrm>
+        </p:spPr>
+        <p:txBody>
+          <a:bodyPr/>
+          <a:lstStyle>
+            <a:lvl1pPr marL="0" indent="0">
+              <a:buNone/>
+              <a:defRPr sz="3200"/>
+            </a:lvl1pPr>
+            <a:lvl2pPr marL="457200" indent="0">
+              <a:buNone/>
+              <a:defRPr sz="2800"/>
+            </a:lvl2pPr>
+            <a:lvl3pPr marL="914400" indent="0">
+              <a:buNone/>
+              <a:defRPr sz="2400"/>
+            </a:lvl3pPr>
+            <a:lvl4pPr marL="1371600" indent="0">
+              <a:buNone/>
+              <a:defRPr sz="2000"/>
+            </a:lvl4pPr>
+            <a:lvl5pPr marL="1828800" indent="0">
+              <a:buNone/>
+              <a:defRPr sz="2000"/>
+            </a:lvl5pPr>
+            <a:lvl6pPr marL="2286000" indent="0">
+              <a:buNone/>
+              <a:defRPr sz="2000"/>
+            </a:lvl6pPr>
+            <a:lvl7pPr marL="2743200" indent="0">
+              <a:buNone/>
+              <a:defRPr sz="2000"/>
+            </a:lvl7pPr>
+            <a:lvl8pPr marL="3200400" indent="0">
+              <a:buNone/>
+              <a:defRPr sz="2000"/>
+            </a:lvl8pPr>
+            <a:lvl9pPr marL="3657600" indent="0">
+              <a:buNone/>
+              <a:defRPr sz="2000"/>
+            </a:lvl9pPr>
+          </a:lstStyle>
+          <a:p>
+            <a:endParaRPr lang="ko-KR" altLang="en-US"/>
+          </a:p>
+        </p:txBody>
+      </p:sp>
+      <p:sp>
+        <p:nvSpPr>
+          <p:cNvPr id="4" name="텍스트 개체 틀 3">
+            <a:extLst>
+              <a:ext uri="{FF2B5EF4-FFF2-40B4-BE49-F238E27FC236}">
+                <a16:creationId xmlns:a16="http://schemas.microsoft.com/office/drawing/2014/main" id="{B1E822EC-CA3A-CF18-980D-1E4F5B0EF725}"/>
+              </a:ext>
+            </a:extLst>
+          </p:cNvPr>
+          <p:cNvSpPr>
+            <a:spLocks noGrp="1"/>
+          </p:cNvSpPr>
+          <p:nvPr>
+            <p:ph type="body" sz="half" idx="2"/>
+          </p:nvPr>
+        </p:nvSpPr>
+        <p:spPr>
+          <a:xfrm>
+            <a:off x="839788" y="2057400"/>
+            <a:ext cx="3932237" cy="3811588"/>
+          </a:xfrm>
+        </p:spPr>
+        <p:txBody>
+          <a:bodyPr/>
+          <a:lstStyle>
+            <a:lvl1pPr marL="0" indent="0">
+              <a:buNone/>
+              <a:defRPr sz="1600"/>
+            </a:lvl1pPr>
+            <a:lvl2pPr marL="457200" indent="0">
+              <a:buNone/>
+              <a:defRPr sz="1400"/>
+            </a:lvl2pPr>
+            <a:lvl3pPr marL="914400" indent="0">
+              <a:buNone/>
+              <a:defRPr sz="1200"/>
+            </a:lvl3pPr>
+            <a:lvl4pPr marL="1371600" indent="0">
+              <a:buNone/>
+              <a:defRPr sz="1000"/>
+            </a:lvl4pPr>
+            <a:lvl5pPr marL="1828800" indent="0">
+              <a:buNone/>
+              <a:defRPr sz="1000"/>
+            </a:lvl5pPr>
+            <a:lvl6pPr marL="2286000" indent="0">
+              <a:buNone/>
+              <a:defRPr sz="1000"/>
+            </a:lvl6pPr>
+            <a:lvl7pPr marL="2743200" indent="0">
+              <a:buNone/>
+              <a:defRPr sz="1000"/>
+            </a:lvl7pPr>
+            <a:lvl8pPr marL="3200400" indent="0">
+              <a:buNone/>
+              <a:defRPr sz="1000"/>
+            </a:lvl8pPr>
+            <a:lvl9pPr marL="3657600" indent="0">
+              <a:buNone/>
+              <a:defRPr sz="1000"/>
+            </a:lvl9pPr>
+          </a:lstStyle>
+          <a:p>
+            <a:pPr lvl="0"/>
+            <a:r>
+              <a:rPr lang="ko-KR" altLang="en-US"/>
+              <a:t>마스터 텍스트 스타일을 편집하려면 클릭</a:t>
+            </a:r>
+          </a:p>
+        </p:txBody>
+      </p:sp>
+      <p:sp>
+        <p:nvSpPr>
+          <p:cNvPr id="5" name="날짜 개체 틀 4">
+            <a:extLst>
+              <a:ext uri="{FF2B5EF4-FFF2-40B4-BE49-F238E27FC236}">
+                <a16:creationId xmlns:a16="http://schemas.microsoft.com/office/drawing/2014/main" id="{B90817CC-AEEE-A396-3146-5B836E21853B}"/>
+              </a:ext>
+            </a:extLst>
+          </p:cNvPr>
+          <p:cNvSpPr>
+            <a:spLocks noGrp="1"/>
+          </p:cNvSpPr>
+          <p:nvPr>
+            <p:ph type="dt" sz="half" idx="10"/>
+          </p:nvPr>
+        </p:nvSpPr>
+        <p:spPr/>
+        <p:txBody>
+          <a:bodyPr/>
+          <a:lstStyle/>
+          <a:p>
+            <a:fld id="{995C7C8F-822A-4723-A724-B24BDCABEA27}" type="datetimeFigureOut">
+              <a:rPr lang="ko-KR" altLang="en-US" smtClean="0"/>
+              <a:t>2025-07-17</a:t>
+            </a:fld>
+            <a:endParaRPr lang="ko-KR" altLang="en-US"/>
+          </a:p>
+        </p:txBody>
+      </p:sp>
+      <p:sp>
+        <p:nvSpPr>
+          <p:cNvPr id="6" name="바닥글 개체 틀 5">
+            <a:extLst>
+              <a:ext uri="{FF2B5EF4-FFF2-40B4-BE49-F238E27FC236}">
+                <a16:creationId xmlns:a16="http://schemas.microsoft.com/office/drawing/2014/main" id="{48F52151-B15F-286C-5A38-6E1469577B99}"/>
+              </a:ext>
+            </a:extLst>
+          </p:cNvPr>
+          <p:cNvSpPr>
+            <a:spLocks noGrp="1"/>
+          </p:cNvSpPr>
+          <p:nvPr>
+            <p:ph type="ftr" sz="quarter" idx="11"/>
+          </p:nvPr>
+        </p:nvSpPr>
+        <p:spPr/>
+        <p:txBody>
+          <a:bodyPr/>
+          <a:lstStyle/>
+          <a:p>
+            <a:endParaRPr lang="ko-KR" altLang="en-US"/>
+          </a:p>
+        </p:txBody>
+      </p:sp>
+      <p:sp>
+        <p:nvSpPr>
+          <p:cNvPr id="7" name="슬라이드 번호 개체 틀 6">
+            <a:extLst>
+              <a:ext uri="{FF2B5EF4-FFF2-40B4-BE49-F238E27FC236}">
+                <a16:creationId xmlns:a16="http://schemas.microsoft.com/office/drawing/2014/main" id="{1041B3B1-977C-A6B3-64AE-92DFFA07EE6D}"/>
+              </a:ext>
+            </a:extLst>
+          </p:cNvPr>
+          <p:cNvSpPr>
+            <a:spLocks noGrp="1"/>
+          </p:cNvSpPr>
+          <p:nvPr>
+            <p:ph type="sldNum" sz="quarter" idx="12"/>
+          </p:nvPr>
+        </p:nvSpPr>
+        <p:spPr/>
+        <p:txBody>
+          <a:bodyPr/>
+          <a:lstStyle/>
+          <a:p>
+            <a:fld id="{6F89A9E9-A8B1-4524-AE75-5A6692DCE9C4}" type="slidenum">
+              <a:rPr lang="ko-KR" altLang="en-US" smtClean="0"/>
+              <a:t>‹#›</a:t>
+            </a:fld>
+            <a:endParaRPr lang="ko-KR" altLang="en-US"/>
+          </a:p>
+        </p:txBody>
+      </p:sp>
+    </p:spTree>
+    <p:extLst>
+      <p:ext uri="{BB962C8B-B14F-4D97-AF65-F5344CB8AC3E}">
+        <p14:creationId xmlns:p14="http://schemas.microsoft.com/office/powerpoint/2010/main" val="3208407989"/>
+      </p:ext>
+    </p:extLst>
+  </p:cSld>
+  <p:clrMapOvr>
+    <a:masterClrMapping/>
+  </p:clrMapOvr>
+</p:sldLayout>
+</file>
+
+<file path=ppt/slideLayouts/slideLayout21.xml><?xml version="1.0" encoding="utf-8"?>
+<p:sldLayout xmlns:a="http://schemas.openxmlformats.org/drawingml/2006/main" xmlns:r="http://schemas.openxmlformats.org/officeDocument/2006/relationships" xmlns:p="http://schemas.openxmlformats.org/presentationml/2006/main" type="vertTx" preserve="1">
+  <p:cSld name="제목 및 세로 텍스트">
+    <p:spTree>
+      <p:nvGrpSpPr>
+        <p:cNvPr id="1" name=""/>
+        <p:cNvGrpSpPr/>
+        <p:nvPr/>
+      </p:nvGrpSpPr>
+      <p:grpSpPr>
+        <a:xfrm>
+          <a:off x="0" y="0"/>
+          <a:ext cx="0" cy="0"/>
+          <a:chOff x="0" y="0"/>
+          <a:chExt cx="0" cy="0"/>
+        </a:xfrm>
+      </p:grpSpPr>
+      <p:sp>
+        <p:nvSpPr>
+          <p:cNvPr id="2" name="제목 1">
+            <a:extLst>
+              <a:ext uri="{FF2B5EF4-FFF2-40B4-BE49-F238E27FC236}">
+                <a16:creationId xmlns:a16="http://schemas.microsoft.com/office/drawing/2014/main" id="{0449232F-0259-D281-482A-795E3A0120B4}"/>
+              </a:ext>
+            </a:extLst>
+          </p:cNvPr>
+          <p:cNvSpPr>
+            <a:spLocks noGrp="1"/>
+          </p:cNvSpPr>
+          <p:nvPr>
+            <p:ph type="title"/>
+          </p:nvPr>
+        </p:nvSpPr>
+        <p:spPr/>
+        <p:txBody>
+          <a:bodyPr/>
+          <a:lstStyle/>
+          <a:p>
+            <a:r>
+              <a:rPr lang="ko-KR" altLang="en-US"/>
+              <a:t>마스터 제목 스타일 편집</a:t>
+            </a:r>
+          </a:p>
+        </p:txBody>
+      </p:sp>
+      <p:sp>
+        <p:nvSpPr>
+          <p:cNvPr id="3" name="세로 텍스트 개체 틀 2">
+            <a:extLst>
+              <a:ext uri="{FF2B5EF4-FFF2-40B4-BE49-F238E27FC236}">
+                <a16:creationId xmlns:a16="http://schemas.microsoft.com/office/drawing/2014/main" id="{5B6487E5-ECAB-E31D-556E-0F72061D22F4}"/>
+              </a:ext>
+            </a:extLst>
+          </p:cNvPr>
+          <p:cNvSpPr>
+            <a:spLocks noGrp="1"/>
+          </p:cNvSpPr>
+          <p:nvPr>
+            <p:ph type="body" orient="vert" idx="1"/>
+          </p:nvPr>
+        </p:nvSpPr>
+        <p:spPr/>
+        <p:txBody>
+          <a:bodyPr vert="eaVert"/>
+          <a:lstStyle/>
+          <a:p>
+            <a:pPr lvl="0"/>
+            <a:r>
+              <a:rPr lang="ko-KR" altLang="en-US"/>
+              <a:t>마스터 텍스트 스타일을 편집하려면 클릭</a:t>
+            </a:r>
+          </a:p>
+          <a:p>
+            <a:pPr lvl="1"/>
+            <a:r>
+              <a:rPr lang="ko-KR" altLang="en-US"/>
+              <a:t>두 번째 수준</a:t>
+            </a:r>
+          </a:p>
+          <a:p>
+            <a:pPr lvl="2"/>
+            <a:r>
+              <a:rPr lang="ko-KR" altLang="en-US"/>
+              <a:t>세 번째 수준</a:t>
+            </a:r>
+          </a:p>
+          <a:p>
+            <a:pPr lvl="3"/>
+            <a:r>
+              <a:rPr lang="ko-KR" altLang="en-US"/>
+              <a:t>네 번째 수준</a:t>
+            </a:r>
+          </a:p>
+          <a:p>
+            <a:pPr lvl="4"/>
+            <a:r>
+              <a:rPr lang="ko-KR" altLang="en-US"/>
+              <a:t>다섯 번째 수준</a:t>
+            </a:r>
+          </a:p>
+        </p:txBody>
+      </p:sp>
+      <p:sp>
+        <p:nvSpPr>
+          <p:cNvPr id="4" name="날짜 개체 틀 3">
+            <a:extLst>
+              <a:ext uri="{FF2B5EF4-FFF2-40B4-BE49-F238E27FC236}">
+                <a16:creationId xmlns:a16="http://schemas.microsoft.com/office/drawing/2014/main" id="{F767B21D-6700-E965-D8AA-5757BD41E18D}"/>
+              </a:ext>
+            </a:extLst>
+          </p:cNvPr>
+          <p:cNvSpPr>
+            <a:spLocks noGrp="1"/>
+          </p:cNvSpPr>
+          <p:nvPr>
+            <p:ph type="dt" sz="half" idx="10"/>
+          </p:nvPr>
+        </p:nvSpPr>
+        <p:spPr/>
+        <p:txBody>
+          <a:bodyPr/>
+          <a:lstStyle/>
+          <a:p>
+            <a:fld id="{995C7C8F-822A-4723-A724-B24BDCABEA27}" type="datetimeFigureOut">
+              <a:rPr lang="ko-KR" altLang="en-US" smtClean="0"/>
+              <a:t>2025-07-17</a:t>
+            </a:fld>
+            <a:endParaRPr lang="ko-KR" altLang="en-US"/>
+          </a:p>
+        </p:txBody>
+      </p:sp>
+      <p:sp>
+        <p:nvSpPr>
+          <p:cNvPr id="5" name="바닥글 개체 틀 4">
+            <a:extLst>
+              <a:ext uri="{FF2B5EF4-FFF2-40B4-BE49-F238E27FC236}">
+                <a16:creationId xmlns:a16="http://schemas.microsoft.com/office/drawing/2014/main" id="{CA1B398F-B066-AE39-4626-2CC623A847E9}"/>
+              </a:ext>
+            </a:extLst>
+          </p:cNvPr>
+          <p:cNvSpPr>
+            <a:spLocks noGrp="1"/>
+          </p:cNvSpPr>
+          <p:nvPr>
+            <p:ph type="ftr" sz="quarter" idx="11"/>
+          </p:nvPr>
+        </p:nvSpPr>
+        <p:spPr/>
+        <p:txBody>
+          <a:bodyPr/>
+          <a:lstStyle/>
+          <a:p>
+            <a:endParaRPr lang="ko-KR" altLang="en-US"/>
+          </a:p>
+        </p:txBody>
+      </p:sp>
+      <p:sp>
+        <p:nvSpPr>
+          <p:cNvPr id="6" name="슬라이드 번호 개체 틀 5">
+            <a:extLst>
+              <a:ext uri="{FF2B5EF4-FFF2-40B4-BE49-F238E27FC236}">
+                <a16:creationId xmlns:a16="http://schemas.microsoft.com/office/drawing/2014/main" id="{9BBFD0D5-BCF5-1746-90C3-99423EB55D1D}"/>
+              </a:ext>
+            </a:extLst>
+          </p:cNvPr>
+          <p:cNvSpPr>
+            <a:spLocks noGrp="1"/>
+          </p:cNvSpPr>
+          <p:nvPr>
+            <p:ph type="sldNum" sz="quarter" idx="12"/>
+          </p:nvPr>
+        </p:nvSpPr>
+        <p:spPr/>
+        <p:txBody>
+          <a:bodyPr/>
+          <a:lstStyle/>
+          <a:p>
+            <a:fld id="{6F89A9E9-A8B1-4524-AE75-5A6692DCE9C4}" type="slidenum">
+              <a:rPr lang="ko-KR" altLang="en-US" smtClean="0"/>
+              <a:t>‹#›</a:t>
+            </a:fld>
+            <a:endParaRPr lang="ko-KR" altLang="en-US"/>
+          </a:p>
+        </p:txBody>
+      </p:sp>
+    </p:spTree>
+    <p:extLst>
+      <p:ext uri="{BB962C8B-B14F-4D97-AF65-F5344CB8AC3E}">
+        <p14:creationId xmlns:p14="http://schemas.microsoft.com/office/powerpoint/2010/main" val="826992405"/>
+      </p:ext>
+    </p:extLst>
+  </p:cSld>
+  <p:clrMapOvr>
+    <a:masterClrMapping/>
+  </p:clrMapOvr>
+</p:sldLayout>
+</file>
+
+<file path=ppt/slideLayouts/slideLayout22.xml><?xml version="1.0" encoding="utf-8"?>
+<p:sldLayout xmlns:a="http://schemas.openxmlformats.org/drawingml/2006/main" xmlns:r="http://schemas.openxmlformats.org/officeDocument/2006/relationships" xmlns:p="http://schemas.openxmlformats.org/presentationml/2006/main" type="vertTitleAndTx" preserve="1">
+  <p:cSld name="세로 제목 및 텍스트">
+    <p:spTree>
+      <p:nvGrpSpPr>
+        <p:cNvPr id="1" name=""/>
+        <p:cNvGrpSpPr/>
+        <p:nvPr/>
+      </p:nvGrpSpPr>
+      <p:grpSpPr>
+        <a:xfrm>
+          <a:off x="0" y="0"/>
+          <a:ext cx="0" cy="0"/>
+          <a:chOff x="0" y="0"/>
+          <a:chExt cx="0" cy="0"/>
+        </a:xfrm>
+      </p:grpSpPr>
+      <p:sp>
+        <p:nvSpPr>
+          <p:cNvPr id="2" name="세로 제목 1">
+            <a:extLst>
+              <a:ext uri="{FF2B5EF4-FFF2-40B4-BE49-F238E27FC236}">
+                <a16:creationId xmlns:a16="http://schemas.microsoft.com/office/drawing/2014/main" id="{71D96222-EAA6-F744-F27C-B7D5E2DBF18F}"/>
+              </a:ext>
+            </a:extLst>
+          </p:cNvPr>
+          <p:cNvSpPr>
+            <a:spLocks noGrp="1"/>
+          </p:cNvSpPr>
+          <p:nvPr>
+            <p:ph type="title" orient="vert"/>
+          </p:nvPr>
+        </p:nvSpPr>
+        <p:spPr>
+          <a:xfrm>
+            <a:off x="8724900" y="365125"/>
+            <a:ext cx="2628900" cy="5811838"/>
+          </a:xfrm>
+        </p:spPr>
+        <p:txBody>
+          <a:bodyPr vert="eaVert"/>
+          <a:lstStyle/>
+          <a:p>
+            <a:r>
+              <a:rPr lang="ko-KR" altLang="en-US"/>
+              <a:t>마스터 제목 스타일 편집</a:t>
+            </a:r>
+          </a:p>
+        </p:txBody>
+      </p:sp>
+      <p:sp>
+        <p:nvSpPr>
+          <p:cNvPr id="3" name="세로 텍스트 개체 틀 2">
+            <a:extLst>
+              <a:ext uri="{FF2B5EF4-FFF2-40B4-BE49-F238E27FC236}">
+                <a16:creationId xmlns:a16="http://schemas.microsoft.com/office/drawing/2014/main" id="{3441E7DE-98A9-3340-B0A6-C6121D345597}"/>
+              </a:ext>
+            </a:extLst>
+          </p:cNvPr>
+          <p:cNvSpPr>
+            <a:spLocks noGrp="1"/>
+          </p:cNvSpPr>
+          <p:nvPr>
+            <p:ph type="body" orient="vert" idx="1"/>
+          </p:nvPr>
+        </p:nvSpPr>
+        <p:spPr>
+          <a:xfrm>
+            <a:off x="838200" y="365125"/>
+            <a:ext cx="7734300" cy="5811838"/>
+          </a:xfrm>
+        </p:spPr>
+        <p:txBody>
+          <a:bodyPr vert="eaVert"/>
+          <a:lstStyle/>
+          <a:p>
+            <a:pPr lvl="0"/>
+            <a:r>
+              <a:rPr lang="ko-KR" altLang="en-US"/>
+              <a:t>마스터 텍스트 스타일을 편집하려면 클릭</a:t>
+            </a:r>
+          </a:p>
+          <a:p>
+            <a:pPr lvl="1"/>
+            <a:r>
+              <a:rPr lang="ko-KR" altLang="en-US"/>
+              <a:t>두 번째 수준</a:t>
+            </a:r>
+          </a:p>
+          <a:p>
+            <a:pPr lvl="2"/>
+            <a:r>
+              <a:rPr lang="ko-KR" altLang="en-US"/>
+              <a:t>세 번째 수준</a:t>
+            </a:r>
+          </a:p>
+          <a:p>
+            <a:pPr lvl="3"/>
+            <a:r>
+              <a:rPr lang="ko-KR" altLang="en-US"/>
+              <a:t>네 번째 수준</a:t>
+            </a:r>
+          </a:p>
+          <a:p>
+            <a:pPr lvl="4"/>
+            <a:r>
+              <a:rPr lang="ko-KR" altLang="en-US"/>
+              <a:t>다섯 번째 수준</a:t>
+            </a:r>
+          </a:p>
+        </p:txBody>
+      </p:sp>
+      <p:sp>
+        <p:nvSpPr>
+          <p:cNvPr id="4" name="날짜 개체 틀 3">
+            <a:extLst>
+              <a:ext uri="{FF2B5EF4-FFF2-40B4-BE49-F238E27FC236}">
+                <a16:creationId xmlns:a16="http://schemas.microsoft.com/office/drawing/2014/main" id="{4E44A835-7DE6-531E-913F-229CFC3BD219}"/>
+              </a:ext>
+            </a:extLst>
+          </p:cNvPr>
+          <p:cNvSpPr>
+            <a:spLocks noGrp="1"/>
+          </p:cNvSpPr>
+          <p:nvPr>
+            <p:ph type="dt" sz="half" idx="10"/>
+          </p:nvPr>
+        </p:nvSpPr>
+        <p:spPr/>
+        <p:txBody>
+          <a:bodyPr/>
+          <a:lstStyle/>
+          <a:p>
+            <a:fld id="{995C7C8F-822A-4723-A724-B24BDCABEA27}" type="datetimeFigureOut">
+              <a:rPr lang="ko-KR" altLang="en-US" smtClean="0"/>
+              <a:t>2025-07-17</a:t>
+            </a:fld>
+            <a:endParaRPr lang="ko-KR" altLang="en-US"/>
+          </a:p>
+        </p:txBody>
+      </p:sp>
+      <p:sp>
+        <p:nvSpPr>
+          <p:cNvPr id="5" name="바닥글 개체 틀 4">
+            <a:extLst>
+              <a:ext uri="{FF2B5EF4-FFF2-40B4-BE49-F238E27FC236}">
+                <a16:creationId xmlns:a16="http://schemas.microsoft.com/office/drawing/2014/main" id="{7770D9F8-7396-3FBC-730C-BCDFE9D7845B}"/>
+              </a:ext>
+            </a:extLst>
+          </p:cNvPr>
+          <p:cNvSpPr>
+            <a:spLocks noGrp="1"/>
+          </p:cNvSpPr>
+          <p:nvPr>
+            <p:ph type="ftr" sz="quarter" idx="11"/>
+          </p:nvPr>
+        </p:nvSpPr>
+        <p:spPr/>
+        <p:txBody>
+          <a:bodyPr/>
+          <a:lstStyle/>
+          <a:p>
+            <a:endParaRPr lang="ko-KR" altLang="en-US"/>
+          </a:p>
+        </p:txBody>
+      </p:sp>
+      <p:sp>
+        <p:nvSpPr>
+          <p:cNvPr id="6" name="슬라이드 번호 개체 틀 5">
+            <a:extLst>
+              <a:ext uri="{FF2B5EF4-FFF2-40B4-BE49-F238E27FC236}">
+                <a16:creationId xmlns:a16="http://schemas.microsoft.com/office/drawing/2014/main" id="{3634139E-ADE1-80AE-29CE-297CBC11EC52}"/>
+              </a:ext>
+            </a:extLst>
+          </p:cNvPr>
+          <p:cNvSpPr>
+            <a:spLocks noGrp="1"/>
+          </p:cNvSpPr>
+          <p:nvPr>
+            <p:ph type="sldNum" sz="quarter" idx="12"/>
+          </p:nvPr>
+        </p:nvSpPr>
+        <p:spPr/>
+        <p:txBody>
+          <a:bodyPr/>
+          <a:lstStyle/>
+          <a:p>
+            <a:fld id="{6F89A9E9-A8B1-4524-AE75-5A6692DCE9C4}" type="slidenum">
+              <a:rPr lang="ko-KR" altLang="en-US" smtClean="0"/>
+              <a:t>‹#›</a:t>
+            </a:fld>
+            <a:endParaRPr lang="ko-KR" altLang="en-US"/>
+          </a:p>
+        </p:txBody>
+      </p:sp>
+    </p:spTree>
+    <p:extLst>
+      <p:ext uri="{BB962C8B-B14F-4D97-AF65-F5344CB8AC3E}">
+        <p14:creationId xmlns:p14="http://schemas.microsoft.com/office/powerpoint/2010/main" val="485113009"/>
       </p:ext>
     </p:extLst>
   </p:cSld>
@@ -1658,7 +4288,7 @@
           <a:p>
             <a:fld id="{502CD248-AE16-47FA-AF5A-2F10FD8A8207}" type="datetimeFigureOut">
               <a:rPr lang="ko-KR" altLang="en-US" smtClean="0"/>
-              <a:t>2025-06-04</a:t>
+              <a:t>2025-07-17</a:t>
             </a:fld>
             <a:endParaRPr lang="ko-KR" altLang="en-US"/>
           </a:p>
@@ -1923,7 +4553,7 @@
           <a:p>
             <a:fld id="{502CD248-AE16-47FA-AF5A-2F10FD8A8207}" type="datetimeFigureOut">
               <a:rPr lang="ko-KR" altLang="en-US" smtClean="0"/>
-              <a:t>2025-06-04</a:t>
+              <a:t>2025-07-17</a:t>
             </a:fld>
             <a:endParaRPr lang="ko-KR" altLang="en-US"/>
           </a:p>
@@ -2335,7 +4965,7 @@
           <a:p>
             <a:fld id="{502CD248-AE16-47FA-AF5A-2F10FD8A8207}" type="datetimeFigureOut">
               <a:rPr lang="ko-KR" altLang="en-US" smtClean="0"/>
-              <a:t>2025-06-04</a:t>
+              <a:t>2025-07-17</a:t>
             </a:fld>
             <a:endParaRPr lang="ko-KR" altLang="en-US"/>
           </a:p>
@@ -2476,7 +5106,7 @@
           <a:p>
             <a:fld id="{502CD248-AE16-47FA-AF5A-2F10FD8A8207}" type="datetimeFigureOut">
               <a:rPr lang="ko-KR" altLang="en-US" smtClean="0"/>
-              <a:t>2025-06-04</a:t>
+              <a:t>2025-07-17</a:t>
             </a:fld>
             <a:endParaRPr lang="ko-KR" altLang="en-US"/>
           </a:p>
@@ -2589,7 +5219,7 @@
           <a:p>
             <a:fld id="{502CD248-AE16-47FA-AF5A-2F10FD8A8207}" type="datetimeFigureOut">
               <a:rPr lang="ko-KR" altLang="en-US" smtClean="0"/>
-              <a:t>2025-06-04</a:t>
+              <a:t>2025-07-17</a:t>
             </a:fld>
             <a:endParaRPr lang="ko-KR" altLang="en-US"/>
           </a:p>
@@ -2900,7 +5530,7 @@
           <a:p>
             <a:fld id="{502CD248-AE16-47FA-AF5A-2F10FD8A8207}" type="datetimeFigureOut">
               <a:rPr lang="ko-KR" altLang="en-US" smtClean="0"/>
-              <a:t>2025-06-04</a:t>
+              <a:t>2025-07-17</a:t>
             </a:fld>
             <a:endParaRPr lang="ko-KR" altLang="en-US"/>
           </a:p>
@@ -3188,7 +5818,7 @@
           <a:p>
             <a:fld id="{502CD248-AE16-47FA-AF5A-2F10FD8A8207}" type="datetimeFigureOut">
               <a:rPr lang="ko-KR" altLang="en-US" smtClean="0"/>
-              <a:t>2025-06-04</a:t>
+              <a:t>2025-07-17</a:t>
             </a:fld>
             <a:endParaRPr lang="ko-KR" altLang="en-US"/>
           </a:p>
@@ -3429,7 +6059,7 @@
           <a:p>
             <a:fld id="{502CD248-AE16-47FA-AF5A-2F10FD8A8207}" type="datetimeFigureOut">
               <a:rPr lang="ko-KR" altLang="en-US" smtClean="0"/>
-              <a:t>2025-06-04</a:t>
+              <a:t>2025-07-17</a:t>
             </a:fld>
             <a:endParaRPr lang="ko-KR" altLang="en-US"/>
           </a:p>
@@ -3545,6 +6175,574 @@
     <p:sldLayoutId id="2147483657" r:id="rId9"/>
     <p:sldLayoutId id="2147483658" r:id="rId10"/>
     <p:sldLayoutId id="2147483659" r:id="rId11"/>
+  </p:sldLayoutIdLst>
+  <p:txStyles>
+    <p:titleStyle>
+      <a:lvl1pPr algn="l" defTabSz="914400" rtl="0" eaLnBrk="1" latinLnBrk="1" hangingPunct="1">
+        <a:lnSpc>
+          <a:spcPct val="90000"/>
+        </a:lnSpc>
+        <a:spcBef>
+          <a:spcPct val="0"/>
+        </a:spcBef>
+        <a:buNone/>
+        <a:defRPr sz="4400" kern="1200">
+          <a:solidFill>
+            <a:schemeClr val="tx1"/>
+          </a:solidFill>
+          <a:latin typeface="+mj-lt"/>
+          <a:ea typeface="+mj-ea"/>
+          <a:cs typeface="+mj-cs"/>
+        </a:defRPr>
+      </a:lvl1pPr>
+    </p:titleStyle>
+    <p:bodyStyle>
+      <a:lvl1pPr marL="228600" indent="-228600" algn="l" defTabSz="914400" rtl="0" eaLnBrk="1" latinLnBrk="1" hangingPunct="1">
+        <a:lnSpc>
+          <a:spcPct val="90000"/>
+        </a:lnSpc>
+        <a:spcBef>
+          <a:spcPts val="1000"/>
+        </a:spcBef>
+        <a:buFont typeface="Arial" panose="020B0604020202020204" pitchFamily="34" charset="0"/>
+        <a:buChar char="•"/>
+        <a:defRPr sz="2800" kern="1200">
+          <a:solidFill>
+            <a:schemeClr val="tx1"/>
+          </a:solidFill>
+          <a:latin typeface="+mn-lt"/>
+          <a:ea typeface="+mn-ea"/>
+          <a:cs typeface="+mn-cs"/>
+        </a:defRPr>
+      </a:lvl1pPr>
+      <a:lvl2pPr marL="685800" indent="-228600" algn="l" defTabSz="914400" rtl="0" eaLnBrk="1" latinLnBrk="1" hangingPunct="1">
+        <a:lnSpc>
+          <a:spcPct val="90000"/>
+        </a:lnSpc>
+        <a:spcBef>
+          <a:spcPts val="500"/>
+        </a:spcBef>
+        <a:buFont typeface="Arial" panose="020B0604020202020204" pitchFamily="34" charset="0"/>
+        <a:buChar char="•"/>
+        <a:defRPr sz="2400" kern="1200">
+          <a:solidFill>
+            <a:schemeClr val="tx1"/>
+          </a:solidFill>
+          <a:latin typeface="+mn-lt"/>
+          <a:ea typeface="+mn-ea"/>
+          <a:cs typeface="+mn-cs"/>
+        </a:defRPr>
+      </a:lvl2pPr>
+      <a:lvl3pPr marL="1143000" indent="-228600" algn="l" defTabSz="914400" rtl="0" eaLnBrk="1" latinLnBrk="1" hangingPunct="1">
+        <a:lnSpc>
+          <a:spcPct val="90000"/>
+        </a:lnSpc>
+        <a:spcBef>
+          <a:spcPts val="500"/>
+        </a:spcBef>
+        <a:buFont typeface="Arial" panose="020B0604020202020204" pitchFamily="34" charset="0"/>
+        <a:buChar char="•"/>
+        <a:defRPr sz="2000" kern="1200">
+          <a:solidFill>
+            <a:schemeClr val="tx1"/>
+          </a:solidFill>
+          <a:latin typeface="+mn-lt"/>
+          <a:ea typeface="+mn-ea"/>
+          <a:cs typeface="+mn-cs"/>
+        </a:defRPr>
+      </a:lvl3pPr>
+      <a:lvl4pPr marL="1600200" indent="-228600" algn="l" defTabSz="914400" rtl="0" eaLnBrk="1" latinLnBrk="1" hangingPunct="1">
+        <a:lnSpc>
+          <a:spcPct val="90000"/>
+        </a:lnSpc>
+        <a:spcBef>
+          <a:spcPts val="500"/>
+        </a:spcBef>
+        <a:buFont typeface="Arial" panose="020B0604020202020204" pitchFamily="34" charset="0"/>
+        <a:buChar char="•"/>
+        <a:defRPr sz="1800" kern="1200">
+          <a:solidFill>
+            <a:schemeClr val="tx1"/>
+          </a:solidFill>
+          <a:latin typeface="+mn-lt"/>
+          <a:ea typeface="+mn-ea"/>
+          <a:cs typeface="+mn-cs"/>
+        </a:defRPr>
+      </a:lvl4pPr>
+      <a:lvl5pPr marL="2057400" indent="-228600" algn="l" defTabSz="914400" rtl="0" eaLnBrk="1" latinLnBrk="1" hangingPunct="1">
+        <a:lnSpc>
+          <a:spcPct val="90000"/>
+        </a:lnSpc>
+        <a:spcBef>
+          <a:spcPts val="500"/>
+        </a:spcBef>
+        <a:buFont typeface="Arial" panose="020B0604020202020204" pitchFamily="34" charset="0"/>
+        <a:buChar char="•"/>
+        <a:defRPr sz="1800" kern="1200">
+          <a:solidFill>
+            <a:schemeClr val="tx1"/>
+          </a:solidFill>
+          <a:latin typeface="+mn-lt"/>
+          <a:ea typeface="+mn-ea"/>
+          <a:cs typeface="+mn-cs"/>
+        </a:defRPr>
+      </a:lvl5pPr>
+      <a:lvl6pPr marL="2514600" indent="-228600" algn="l" defTabSz="914400" rtl="0" eaLnBrk="1" latinLnBrk="1" hangingPunct="1">
+        <a:lnSpc>
+          <a:spcPct val="90000"/>
+        </a:lnSpc>
+        <a:spcBef>
+          <a:spcPts val="500"/>
+        </a:spcBef>
+        <a:buFont typeface="Arial" panose="020B0604020202020204" pitchFamily="34" charset="0"/>
+        <a:buChar char="•"/>
+        <a:defRPr sz="1800" kern="1200">
+          <a:solidFill>
+            <a:schemeClr val="tx1"/>
+          </a:solidFill>
+          <a:latin typeface="+mn-lt"/>
+          <a:ea typeface="+mn-ea"/>
+          <a:cs typeface="+mn-cs"/>
+        </a:defRPr>
+      </a:lvl6pPr>
+      <a:lvl7pPr marL="2971800" indent="-228600" algn="l" defTabSz="914400" rtl="0" eaLnBrk="1" latinLnBrk="1" hangingPunct="1">
+        <a:lnSpc>
+          <a:spcPct val="90000"/>
+        </a:lnSpc>
+        <a:spcBef>
+          <a:spcPts val="500"/>
+        </a:spcBef>
+        <a:buFont typeface="Arial" panose="020B0604020202020204" pitchFamily="34" charset="0"/>
+        <a:buChar char="•"/>
+        <a:defRPr sz="1800" kern="1200">
+          <a:solidFill>
+            <a:schemeClr val="tx1"/>
+          </a:solidFill>
+          <a:latin typeface="+mn-lt"/>
+          <a:ea typeface="+mn-ea"/>
+          <a:cs typeface="+mn-cs"/>
+        </a:defRPr>
+      </a:lvl7pPr>
+      <a:lvl8pPr marL="3429000" indent="-228600" algn="l" defTabSz="914400" rtl="0" eaLnBrk="1" latinLnBrk="1" hangingPunct="1">
+        <a:lnSpc>
+          <a:spcPct val="90000"/>
+        </a:lnSpc>
+        <a:spcBef>
+          <a:spcPts val="500"/>
+        </a:spcBef>
+        <a:buFont typeface="Arial" panose="020B0604020202020204" pitchFamily="34" charset="0"/>
+        <a:buChar char="•"/>
+        <a:defRPr sz="1800" kern="1200">
+          <a:solidFill>
+            <a:schemeClr val="tx1"/>
+          </a:solidFill>
+          <a:latin typeface="+mn-lt"/>
+          <a:ea typeface="+mn-ea"/>
+          <a:cs typeface="+mn-cs"/>
+        </a:defRPr>
+      </a:lvl8pPr>
+      <a:lvl9pPr marL="3886200" indent="-228600" algn="l" defTabSz="914400" rtl="0" eaLnBrk="1" latinLnBrk="1" hangingPunct="1">
+        <a:lnSpc>
+          <a:spcPct val="90000"/>
+        </a:lnSpc>
+        <a:spcBef>
+          <a:spcPts val="500"/>
+        </a:spcBef>
+        <a:buFont typeface="Arial" panose="020B0604020202020204" pitchFamily="34" charset="0"/>
+        <a:buChar char="•"/>
+        <a:defRPr sz="1800" kern="1200">
+          <a:solidFill>
+            <a:schemeClr val="tx1"/>
+          </a:solidFill>
+          <a:latin typeface="+mn-lt"/>
+          <a:ea typeface="+mn-ea"/>
+          <a:cs typeface="+mn-cs"/>
+        </a:defRPr>
+      </a:lvl9pPr>
+    </p:bodyStyle>
+    <p:otherStyle>
+      <a:defPPr>
+        <a:defRPr lang="ko-KR"/>
+      </a:defPPr>
+      <a:lvl1pPr marL="0" algn="l" defTabSz="914400" rtl="0" eaLnBrk="1" latinLnBrk="1" hangingPunct="1">
+        <a:defRPr sz="1800" kern="1200">
+          <a:solidFill>
+            <a:schemeClr val="tx1"/>
+          </a:solidFill>
+          <a:latin typeface="+mn-lt"/>
+          <a:ea typeface="+mn-ea"/>
+          <a:cs typeface="+mn-cs"/>
+        </a:defRPr>
+      </a:lvl1pPr>
+      <a:lvl2pPr marL="457200" algn="l" defTabSz="914400" rtl="0" eaLnBrk="1" latinLnBrk="1" hangingPunct="1">
+        <a:defRPr sz="1800" kern="1200">
+          <a:solidFill>
+            <a:schemeClr val="tx1"/>
+          </a:solidFill>
+          <a:latin typeface="+mn-lt"/>
+          <a:ea typeface="+mn-ea"/>
+          <a:cs typeface="+mn-cs"/>
+        </a:defRPr>
+      </a:lvl2pPr>
+      <a:lvl3pPr marL="914400" algn="l" defTabSz="914400" rtl="0" eaLnBrk="1" latinLnBrk="1" hangingPunct="1">
+        <a:defRPr sz="1800" kern="1200">
+          <a:solidFill>
+            <a:schemeClr val="tx1"/>
+          </a:solidFill>
+          <a:latin typeface="+mn-lt"/>
+          <a:ea typeface="+mn-ea"/>
+          <a:cs typeface="+mn-cs"/>
+        </a:defRPr>
+      </a:lvl3pPr>
+      <a:lvl4pPr marL="1371600" algn="l" defTabSz="914400" rtl="0" eaLnBrk="1" latinLnBrk="1" hangingPunct="1">
+        <a:defRPr sz="1800" kern="1200">
+          <a:solidFill>
+            <a:schemeClr val="tx1"/>
+          </a:solidFill>
+          <a:latin typeface="+mn-lt"/>
+          <a:ea typeface="+mn-ea"/>
+          <a:cs typeface="+mn-cs"/>
+        </a:defRPr>
+      </a:lvl4pPr>
+      <a:lvl5pPr marL="1828800" algn="l" defTabSz="914400" rtl="0" eaLnBrk="1" latinLnBrk="1" hangingPunct="1">
+        <a:defRPr sz="1800" kern="1200">
+          <a:solidFill>
+            <a:schemeClr val="tx1"/>
+          </a:solidFill>
+          <a:latin typeface="+mn-lt"/>
+          <a:ea typeface="+mn-ea"/>
+          <a:cs typeface="+mn-cs"/>
+        </a:defRPr>
+      </a:lvl5pPr>
+      <a:lvl6pPr marL="2286000" algn="l" defTabSz="914400" rtl="0" eaLnBrk="1" latinLnBrk="1" hangingPunct="1">
+        <a:defRPr sz="1800" kern="1200">
+          <a:solidFill>
+            <a:schemeClr val="tx1"/>
+          </a:solidFill>
+          <a:latin typeface="+mn-lt"/>
+          <a:ea typeface="+mn-ea"/>
+          <a:cs typeface="+mn-cs"/>
+        </a:defRPr>
+      </a:lvl6pPr>
+      <a:lvl7pPr marL="2743200" algn="l" defTabSz="914400" rtl="0" eaLnBrk="1" latinLnBrk="1" hangingPunct="1">
+        <a:defRPr sz="1800" kern="1200">
+          <a:solidFill>
+            <a:schemeClr val="tx1"/>
+          </a:solidFill>
+          <a:latin typeface="+mn-lt"/>
+          <a:ea typeface="+mn-ea"/>
+          <a:cs typeface="+mn-cs"/>
+        </a:defRPr>
+      </a:lvl7pPr>
+      <a:lvl8pPr marL="3200400" algn="l" defTabSz="914400" rtl="0" eaLnBrk="1" latinLnBrk="1" hangingPunct="1">
+        <a:defRPr sz="1800" kern="1200">
+          <a:solidFill>
+            <a:schemeClr val="tx1"/>
+          </a:solidFill>
+          <a:latin typeface="+mn-lt"/>
+          <a:ea typeface="+mn-ea"/>
+          <a:cs typeface="+mn-cs"/>
+        </a:defRPr>
+      </a:lvl8pPr>
+      <a:lvl9pPr marL="3657600" algn="l" defTabSz="914400" rtl="0" eaLnBrk="1" latinLnBrk="1" hangingPunct="1">
+        <a:defRPr sz="1800" kern="1200">
+          <a:solidFill>
+            <a:schemeClr val="tx1"/>
+          </a:solidFill>
+          <a:latin typeface="+mn-lt"/>
+          <a:ea typeface="+mn-ea"/>
+          <a:cs typeface="+mn-cs"/>
+        </a:defRPr>
+      </a:lvl9pPr>
+    </p:otherStyle>
+  </p:txStyles>
+</p:sldMaster>
+</file>
+
+<file path=ppt/slideMasters/slideMaster2.xml><?xml version="1.0" encoding="utf-8"?>
+<p:sldMaster xmlns:a="http://schemas.openxmlformats.org/drawingml/2006/main" xmlns:r="http://schemas.openxmlformats.org/officeDocument/2006/relationships" xmlns:p="http://schemas.openxmlformats.org/presentationml/2006/main" preserve="1">
+  <p:cSld>
+    <p:bg>
+      <p:bgRef idx="1001">
+        <a:schemeClr val="bg1"/>
+      </p:bgRef>
+    </p:bg>
+    <p:spTree>
+      <p:nvGrpSpPr>
+        <p:cNvPr id="1" name=""/>
+        <p:cNvGrpSpPr/>
+        <p:nvPr/>
+      </p:nvGrpSpPr>
+      <p:grpSpPr>
+        <a:xfrm>
+          <a:off x="0" y="0"/>
+          <a:ext cx="0" cy="0"/>
+          <a:chOff x="0" y="0"/>
+          <a:chExt cx="0" cy="0"/>
+        </a:xfrm>
+      </p:grpSpPr>
+      <p:sp>
+        <p:nvSpPr>
+          <p:cNvPr id="2" name="제목 개체 틀 1">
+            <a:extLst>
+              <a:ext uri="{FF2B5EF4-FFF2-40B4-BE49-F238E27FC236}">
+                <a16:creationId xmlns:a16="http://schemas.microsoft.com/office/drawing/2014/main" id="{A638AA3E-3CBE-0E31-C25B-DDF1738E9A06}"/>
+              </a:ext>
+            </a:extLst>
+          </p:cNvPr>
+          <p:cNvSpPr>
+            <a:spLocks noGrp="1"/>
+          </p:cNvSpPr>
+          <p:nvPr>
+            <p:ph type="title"/>
+          </p:nvPr>
+        </p:nvSpPr>
+        <p:spPr>
+          <a:xfrm>
+            <a:off x="838200" y="365125"/>
+            <a:ext cx="10515600" cy="1325563"/>
+          </a:xfrm>
+          <a:prstGeom prst="rect">
+            <a:avLst/>
+          </a:prstGeom>
+        </p:spPr>
+        <p:txBody>
+          <a:bodyPr vert="horz" lIns="91440" tIns="45720" rIns="91440" bIns="45720" rtlCol="0" anchor="ctr">
+            <a:normAutofit/>
+          </a:bodyPr>
+          <a:lstStyle/>
+          <a:p>
+            <a:r>
+              <a:rPr lang="ko-KR" altLang="en-US"/>
+              <a:t>마스터 제목 스타일 편집</a:t>
+            </a:r>
+          </a:p>
+        </p:txBody>
+      </p:sp>
+      <p:sp>
+        <p:nvSpPr>
+          <p:cNvPr id="3" name="텍스트 개체 틀 2">
+            <a:extLst>
+              <a:ext uri="{FF2B5EF4-FFF2-40B4-BE49-F238E27FC236}">
+                <a16:creationId xmlns:a16="http://schemas.microsoft.com/office/drawing/2014/main" id="{889386C2-7F03-5DC4-B6E0-7465E53BB030}"/>
+              </a:ext>
+            </a:extLst>
+          </p:cNvPr>
+          <p:cNvSpPr>
+            <a:spLocks noGrp="1"/>
+          </p:cNvSpPr>
+          <p:nvPr>
+            <p:ph type="body" idx="1"/>
+          </p:nvPr>
+        </p:nvSpPr>
+        <p:spPr>
+          <a:xfrm>
+            <a:off x="838200" y="1825625"/>
+            <a:ext cx="10515600" cy="4351338"/>
+          </a:xfrm>
+          <a:prstGeom prst="rect">
+            <a:avLst/>
+          </a:prstGeom>
+        </p:spPr>
+        <p:txBody>
+          <a:bodyPr vert="horz" lIns="91440" tIns="45720" rIns="91440" bIns="45720" rtlCol="0">
+            <a:normAutofit/>
+          </a:bodyPr>
+          <a:lstStyle/>
+          <a:p>
+            <a:pPr lvl="0"/>
+            <a:r>
+              <a:rPr lang="ko-KR" altLang="en-US"/>
+              <a:t>마스터 텍스트 스타일을 편집하려면 클릭</a:t>
+            </a:r>
+          </a:p>
+          <a:p>
+            <a:pPr lvl="1"/>
+            <a:r>
+              <a:rPr lang="ko-KR" altLang="en-US"/>
+              <a:t>두 번째 수준</a:t>
+            </a:r>
+          </a:p>
+          <a:p>
+            <a:pPr lvl="2"/>
+            <a:r>
+              <a:rPr lang="ko-KR" altLang="en-US"/>
+              <a:t>세 번째 수준</a:t>
+            </a:r>
+          </a:p>
+          <a:p>
+            <a:pPr lvl="3"/>
+            <a:r>
+              <a:rPr lang="ko-KR" altLang="en-US"/>
+              <a:t>네 번째 수준</a:t>
+            </a:r>
+          </a:p>
+          <a:p>
+            <a:pPr lvl="4"/>
+            <a:r>
+              <a:rPr lang="ko-KR" altLang="en-US"/>
+              <a:t>다섯 번째 수준</a:t>
+            </a:r>
+          </a:p>
+        </p:txBody>
+      </p:sp>
+      <p:sp>
+        <p:nvSpPr>
+          <p:cNvPr id="4" name="날짜 개체 틀 3">
+            <a:extLst>
+              <a:ext uri="{FF2B5EF4-FFF2-40B4-BE49-F238E27FC236}">
+                <a16:creationId xmlns:a16="http://schemas.microsoft.com/office/drawing/2014/main" id="{BECDF101-707F-4943-8E03-9E19AD6D0DFA}"/>
+              </a:ext>
+            </a:extLst>
+          </p:cNvPr>
+          <p:cNvSpPr>
+            <a:spLocks noGrp="1"/>
+          </p:cNvSpPr>
+          <p:nvPr>
+            <p:ph type="dt" sz="half" idx="2"/>
+          </p:nvPr>
+        </p:nvSpPr>
+        <p:spPr>
+          <a:xfrm>
+            <a:off x="838200" y="6356350"/>
+            <a:ext cx="2743200" cy="365125"/>
+          </a:xfrm>
+          <a:prstGeom prst="rect">
+            <a:avLst/>
+          </a:prstGeom>
+        </p:spPr>
+        <p:txBody>
+          <a:bodyPr vert="horz" lIns="91440" tIns="45720" rIns="91440" bIns="45720" rtlCol="0" anchor="ctr"/>
+          <a:lstStyle>
+            <a:lvl1pPr algn="l">
+              <a:defRPr sz="1200">
+                <a:solidFill>
+                  <a:schemeClr val="tx1">
+                    <a:tint val="75000"/>
+                  </a:schemeClr>
+                </a:solidFill>
+              </a:defRPr>
+            </a:lvl1pPr>
+          </a:lstStyle>
+          <a:p>
+            <a:fld id="{995C7C8F-822A-4723-A724-B24BDCABEA27}" type="datetimeFigureOut">
+              <a:rPr lang="ko-KR" altLang="en-US" smtClean="0"/>
+              <a:t>2025-07-17</a:t>
+            </a:fld>
+            <a:endParaRPr lang="ko-KR" altLang="en-US"/>
+          </a:p>
+        </p:txBody>
+      </p:sp>
+      <p:sp>
+        <p:nvSpPr>
+          <p:cNvPr id="5" name="바닥글 개체 틀 4">
+            <a:extLst>
+              <a:ext uri="{FF2B5EF4-FFF2-40B4-BE49-F238E27FC236}">
+                <a16:creationId xmlns:a16="http://schemas.microsoft.com/office/drawing/2014/main" id="{5EADDCAF-B549-10B8-1F53-689C68F0E3BE}"/>
+              </a:ext>
+            </a:extLst>
+          </p:cNvPr>
+          <p:cNvSpPr>
+            <a:spLocks noGrp="1"/>
+          </p:cNvSpPr>
+          <p:nvPr>
+            <p:ph type="ftr" sz="quarter" idx="3"/>
+          </p:nvPr>
+        </p:nvSpPr>
+        <p:spPr>
+          <a:xfrm>
+            <a:off x="4038600" y="6356350"/>
+            <a:ext cx="4114800" cy="365125"/>
+          </a:xfrm>
+          <a:prstGeom prst="rect">
+            <a:avLst/>
+          </a:prstGeom>
+        </p:spPr>
+        <p:txBody>
+          <a:bodyPr vert="horz" lIns="91440" tIns="45720" rIns="91440" bIns="45720" rtlCol="0" anchor="ctr"/>
+          <a:lstStyle>
+            <a:lvl1pPr algn="ctr">
+              <a:defRPr sz="1200">
+                <a:solidFill>
+                  <a:schemeClr val="tx1">
+                    <a:tint val="75000"/>
+                  </a:schemeClr>
+                </a:solidFill>
+              </a:defRPr>
+            </a:lvl1pPr>
+          </a:lstStyle>
+          <a:p>
+            <a:endParaRPr lang="ko-KR" altLang="en-US"/>
+          </a:p>
+        </p:txBody>
+      </p:sp>
+      <p:sp>
+        <p:nvSpPr>
+          <p:cNvPr id="6" name="슬라이드 번호 개체 틀 5">
+            <a:extLst>
+              <a:ext uri="{FF2B5EF4-FFF2-40B4-BE49-F238E27FC236}">
+                <a16:creationId xmlns:a16="http://schemas.microsoft.com/office/drawing/2014/main" id="{FDADD43F-1E1B-4880-B829-C75EF985C5EF}"/>
+              </a:ext>
+            </a:extLst>
+          </p:cNvPr>
+          <p:cNvSpPr>
+            <a:spLocks noGrp="1"/>
+          </p:cNvSpPr>
+          <p:nvPr>
+            <p:ph type="sldNum" sz="quarter" idx="4"/>
+          </p:nvPr>
+        </p:nvSpPr>
+        <p:spPr>
+          <a:xfrm>
+            <a:off x="8610600" y="6356350"/>
+            <a:ext cx="2743200" cy="365125"/>
+          </a:xfrm>
+          <a:prstGeom prst="rect">
+            <a:avLst/>
+          </a:prstGeom>
+        </p:spPr>
+        <p:txBody>
+          <a:bodyPr vert="horz" lIns="91440" tIns="45720" rIns="91440" bIns="45720" rtlCol="0" anchor="ctr"/>
+          <a:lstStyle>
+            <a:lvl1pPr algn="r">
+              <a:defRPr sz="1200">
+                <a:solidFill>
+                  <a:schemeClr val="tx1">
+                    <a:tint val="75000"/>
+                  </a:schemeClr>
+                </a:solidFill>
+              </a:defRPr>
+            </a:lvl1pPr>
+          </a:lstStyle>
+          <a:p>
+            <a:fld id="{6F89A9E9-A8B1-4524-AE75-5A6692DCE9C4}" type="slidenum">
+              <a:rPr lang="ko-KR" altLang="en-US" smtClean="0"/>
+              <a:t>‹#›</a:t>
+            </a:fld>
+            <a:endParaRPr lang="ko-KR" altLang="en-US"/>
+          </a:p>
+        </p:txBody>
+      </p:sp>
+    </p:spTree>
+    <p:extLst>
+      <p:ext uri="{BB962C8B-B14F-4D97-AF65-F5344CB8AC3E}">
+        <p14:creationId xmlns:p14="http://schemas.microsoft.com/office/powerpoint/2010/main" val="1587458627"/>
+      </p:ext>
+    </p:extLst>
+  </p:cSld>
+  <p:clrMap bg1="lt1" tx1="dk1" bg2="lt2" tx2="dk2" accent1="accent1" accent2="accent2" accent3="accent3" accent4="accent4" accent5="accent5" accent6="accent6" hlink="hlink" folHlink="folHlink"/>
+  <p:sldLayoutIdLst>
+    <p:sldLayoutId id="2147483661" r:id="rId1"/>
+    <p:sldLayoutId id="2147483662" r:id="rId2"/>
+    <p:sldLayoutId id="2147483663" r:id="rId3"/>
+    <p:sldLayoutId id="2147483664" r:id="rId4"/>
+    <p:sldLayoutId id="2147483665" r:id="rId5"/>
+    <p:sldLayoutId id="2147483666" r:id="rId6"/>
+    <p:sldLayoutId id="2147483667" r:id="rId7"/>
+    <p:sldLayoutId id="2147483668" r:id="rId8"/>
+    <p:sldLayoutId id="2147483669" r:id="rId9"/>
+    <p:sldLayoutId id="2147483670" r:id="rId10"/>
+    <p:sldLayoutId id="2147483671" r:id="rId11"/>
   </p:sldLayoutIdLst>
   <p:txStyles>
     <p:titleStyle>
@@ -5353,6 +8551,7 @@
           </a:bodyPr>
           <a:lstStyle/>
           <a:p>
+            <a:pPr latinLnBrk="0"/>
             <a:r>
               <a:rPr lang="en-US" altLang="ko-KR" dirty="0"/>
               <a:t>ABC</a:t>
@@ -5670,6 +8869,301 @@
 </file>
 
 <file path=ppt/theme/theme2.xml><?xml version="1.0" encoding="utf-8"?>
+<a:theme xmlns:a="http://schemas.openxmlformats.org/drawingml/2006/main" name="디자인 사용자 지정">
+  <a:themeElements>
+    <a:clrScheme name="Office">
+      <a:dk1>
+        <a:sysClr val="windowText" lastClr="000000"/>
+      </a:dk1>
+      <a:lt1>
+        <a:sysClr val="window" lastClr="FFFFFF"/>
+      </a:lt1>
+      <a:dk2>
+        <a:srgbClr val="44546A"/>
+      </a:dk2>
+      <a:lt2>
+        <a:srgbClr val="E7E6E6"/>
+      </a:lt2>
+      <a:accent1>
+        <a:srgbClr val="4472C4"/>
+      </a:accent1>
+      <a:accent2>
+        <a:srgbClr val="ED7D31"/>
+      </a:accent2>
+      <a:accent3>
+        <a:srgbClr val="A5A5A5"/>
+      </a:accent3>
+      <a:accent4>
+        <a:srgbClr val="FFC000"/>
+      </a:accent4>
+      <a:accent5>
+        <a:srgbClr val="5B9BD5"/>
+      </a:accent5>
+      <a:accent6>
+        <a:srgbClr val="70AD47"/>
+      </a:accent6>
+      <a:hlink>
+        <a:srgbClr val="0563C1"/>
+      </a:hlink>
+      <a:folHlink>
+        <a:srgbClr val="954F72"/>
+      </a:folHlink>
+    </a:clrScheme>
+    <a:fontScheme name="Office">
+      <a:majorFont>
+        <a:latin typeface="맑은 고딕" panose="020F0302020204030204"/>
+        <a:ea typeface=""/>
+        <a:cs typeface=""/>
+        <a:font script="Jpan" typeface="游ゴシック Light"/>
+        <a:font script="Hang" typeface="맑은 고딕"/>
+        <a:font script="Hans" typeface="等线 Light"/>
+        <a:font script="Hant" typeface="新細明體"/>
+        <a:font script="Arab" typeface="Times New Roman"/>
+        <a:font script="Hebr" typeface="Times New Roman"/>
+        <a:font script="Thai" typeface="Angsana New"/>
+        <a:font script="Ethi" typeface="Nyala"/>
+        <a:font script="Beng" typeface="Vrinda"/>
+        <a:font script="Gujr" typeface="Shruti"/>
+        <a:font script="Khmr" typeface="MoolBoran"/>
+        <a:font script="Knda" typeface="Tunga"/>
+        <a:font script="Guru" typeface="Raavi"/>
+        <a:font script="Cans" typeface="Euphemia"/>
+        <a:font script="Cher" typeface="Plantagenet Cherokee"/>
+        <a:font script="Yiii" typeface="Microsoft Yi Baiti"/>
+        <a:font script="Tibt" typeface="Microsoft Himalaya"/>
+        <a:font script="Thaa" typeface="MV Boli"/>
+        <a:font script="Deva" typeface="Mangal"/>
+        <a:font script="Telu" typeface="Gautami"/>
+        <a:font script="Taml" typeface="Latha"/>
+        <a:font script="Syrc" typeface="Estrangelo Edessa"/>
+        <a:font script="Orya" typeface="Kalinga"/>
+        <a:font script="Mlym" typeface="Kartika"/>
+        <a:font script="Laoo" typeface="DokChampa"/>
+        <a:font script="Sinh" typeface="Iskoola Pota"/>
+        <a:font script="Mong" typeface="Mongolian Baiti"/>
+        <a:font script="Viet" typeface="Times New Roman"/>
+        <a:font script="Uigh" typeface="Microsoft Uighur"/>
+        <a:font script="Geor" typeface="Sylfaen"/>
+        <a:font script="Armn" typeface="Arial"/>
+        <a:font script="Bugi" typeface="Leelawadee UI"/>
+        <a:font script="Bopo" typeface="Microsoft JhengHei"/>
+        <a:font script="Java" typeface="Javanese Text"/>
+        <a:font script="Lisu" typeface="Segoe UI"/>
+        <a:font script="Mymr" typeface="Myanmar Text"/>
+        <a:font script="Nkoo" typeface="Ebrima"/>
+        <a:font script="Olck" typeface="Nirmala UI"/>
+        <a:font script="Osma" typeface="Ebrima"/>
+        <a:font script="Phag" typeface="Phagspa"/>
+        <a:font script="Syrn" typeface="Estrangelo Edessa"/>
+        <a:font script="Syrj" typeface="Estrangelo Edessa"/>
+        <a:font script="Syre" typeface="Estrangelo Edessa"/>
+        <a:font script="Sora" typeface="Nirmala UI"/>
+        <a:font script="Tale" typeface="Microsoft Tai Le"/>
+        <a:font script="Talu" typeface="Microsoft New Tai Lue"/>
+        <a:font script="Tfng" typeface="Ebrima"/>
+      </a:majorFont>
+      <a:minorFont>
+        <a:latin typeface="맑은 고딕" panose="020F0502020204030204"/>
+        <a:ea typeface=""/>
+        <a:cs typeface=""/>
+        <a:font script="Jpan" typeface="游ゴシック"/>
+        <a:font script="Hang" typeface="맑은 고딕"/>
+        <a:font script="Hans" typeface="等线"/>
+        <a:font script="Hant" typeface="新細明體"/>
+        <a:font script="Arab" typeface="Arial"/>
+        <a:font script="Hebr" typeface="Arial"/>
+        <a:font script="Thai" typeface="Cordia New"/>
+        <a:font script="Ethi" typeface="Nyala"/>
+        <a:font script="Beng" typeface="Vrinda"/>
+        <a:font script="Gujr" typeface="Shruti"/>
+        <a:font script="Khmr" typeface="DaunPenh"/>
+        <a:font script="Knda" typeface="Tunga"/>
+        <a:font script="Guru" typeface="Raavi"/>
+        <a:font script="Cans" typeface="Euphemia"/>
+        <a:font script="Cher" typeface="Plantagenet Cherokee"/>
+        <a:font script="Yiii" typeface="Microsoft Yi Baiti"/>
+        <a:font script="Tibt" typeface="Microsoft Himalaya"/>
+        <a:font script="Thaa" typeface="MV Boli"/>
+        <a:font script="Deva" typeface="Mangal"/>
+        <a:font script="Telu" typeface="Gautami"/>
+        <a:font script="Taml" typeface="Latha"/>
+        <a:font script="Syrc" typeface="Estrangelo Edessa"/>
+        <a:font script="Orya" typeface="Kalinga"/>
+        <a:font script="Mlym" typeface="Kartika"/>
+        <a:font script="Laoo" typeface="DokChampa"/>
+        <a:font script="Sinh" typeface="Iskoola Pota"/>
+        <a:font script="Mong" typeface="Mongolian Baiti"/>
+        <a:font script="Viet" typeface="Arial"/>
+        <a:font script="Uigh" typeface="Microsoft Uighur"/>
+        <a:font script="Geor" typeface="Sylfaen"/>
+        <a:font script="Armn" typeface="Arial"/>
+        <a:font script="Bugi" typeface="Leelawadee UI"/>
+        <a:font script="Bopo" typeface="Microsoft JhengHei"/>
+        <a:font script="Java" typeface="Javanese Text"/>
+        <a:font script="Lisu" typeface="Segoe UI"/>
+        <a:font script="Mymr" typeface="Myanmar Text"/>
+        <a:font script="Nkoo" typeface="Ebrima"/>
+        <a:font script="Olck" typeface="Nirmala UI"/>
+        <a:font script="Osma" typeface="Ebrima"/>
+        <a:font script="Phag" typeface="Phagspa"/>
+        <a:font script="Syrn" typeface="Estrangelo Edessa"/>
+        <a:font script="Syrj" typeface="Estrangelo Edessa"/>
+        <a:font script="Syre" typeface="Estrangelo Edessa"/>
+        <a:font script="Sora" typeface="Nirmala UI"/>
+        <a:font script="Tale" typeface="Microsoft Tai Le"/>
+        <a:font script="Talu" typeface="Microsoft New Tai Lue"/>
+        <a:font script="Tfng" typeface="Ebrima"/>
+      </a:minorFont>
+    </a:fontScheme>
+    <a:fmtScheme name="Office">
+      <a:fillStyleLst>
+        <a:solidFill>
+          <a:schemeClr val="phClr"/>
+        </a:solidFill>
+        <a:gradFill rotWithShape="1">
+          <a:gsLst>
+            <a:gs pos="0">
+              <a:schemeClr val="phClr">
+                <a:lumMod val="110000"/>
+                <a:satMod val="105000"/>
+                <a:tint val="67000"/>
+              </a:schemeClr>
+            </a:gs>
+            <a:gs pos="50000">
+              <a:schemeClr val="phClr">
+                <a:lumMod val="105000"/>
+                <a:satMod val="103000"/>
+                <a:tint val="73000"/>
+              </a:schemeClr>
+            </a:gs>
+            <a:gs pos="100000">
+              <a:schemeClr val="phClr">
+                <a:lumMod val="105000"/>
+                <a:satMod val="109000"/>
+                <a:tint val="81000"/>
+              </a:schemeClr>
+            </a:gs>
+          </a:gsLst>
+          <a:lin ang="5400000" scaled="0"/>
+        </a:gradFill>
+        <a:gradFill rotWithShape="1">
+          <a:gsLst>
+            <a:gs pos="0">
+              <a:schemeClr val="phClr">
+                <a:satMod val="103000"/>
+                <a:lumMod val="102000"/>
+                <a:tint val="94000"/>
+              </a:schemeClr>
+            </a:gs>
+            <a:gs pos="50000">
+              <a:schemeClr val="phClr">
+                <a:satMod val="110000"/>
+                <a:lumMod val="100000"/>
+                <a:shade val="100000"/>
+              </a:schemeClr>
+            </a:gs>
+            <a:gs pos="100000">
+              <a:schemeClr val="phClr">
+                <a:lumMod val="99000"/>
+                <a:satMod val="120000"/>
+                <a:shade val="78000"/>
+              </a:schemeClr>
+            </a:gs>
+          </a:gsLst>
+          <a:lin ang="5400000" scaled="0"/>
+        </a:gradFill>
+      </a:fillStyleLst>
+      <a:lnStyleLst>
+        <a:ln w="6350" cap="flat" cmpd="sng" algn="ctr">
+          <a:solidFill>
+            <a:schemeClr val="phClr"/>
+          </a:solidFill>
+          <a:prstDash val="solid"/>
+          <a:miter lim="800000"/>
+        </a:ln>
+        <a:ln w="12700" cap="flat" cmpd="sng" algn="ctr">
+          <a:solidFill>
+            <a:schemeClr val="phClr"/>
+          </a:solidFill>
+          <a:prstDash val="solid"/>
+          <a:miter lim="800000"/>
+        </a:ln>
+        <a:ln w="19050" cap="flat" cmpd="sng" algn="ctr">
+          <a:solidFill>
+            <a:schemeClr val="phClr"/>
+          </a:solidFill>
+          <a:prstDash val="solid"/>
+          <a:miter lim="800000"/>
+        </a:ln>
+      </a:lnStyleLst>
+      <a:effectStyleLst>
+        <a:effectStyle>
+          <a:effectLst/>
+        </a:effectStyle>
+        <a:effectStyle>
+          <a:effectLst/>
+        </a:effectStyle>
+        <a:effectStyle>
+          <a:effectLst>
+            <a:outerShdw blurRad="57150" dist="19050" dir="5400000" algn="ctr" rotWithShape="0">
+              <a:srgbClr val="000000">
+                <a:alpha val="63000"/>
+              </a:srgbClr>
+            </a:outerShdw>
+          </a:effectLst>
+        </a:effectStyle>
+      </a:effectStyleLst>
+      <a:bgFillStyleLst>
+        <a:solidFill>
+          <a:schemeClr val="phClr"/>
+        </a:solidFill>
+        <a:solidFill>
+          <a:schemeClr val="phClr">
+            <a:tint val="95000"/>
+            <a:satMod val="170000"/>
+          </a:schemeClr>
+        </a:solidFill>
+        <a:gradFill rotWithShape="1">
+          <a:gsLst>
+            <a:gs pos="0">
+              <a:schemeClr val="phClr">
+                <a:tint val="93000"/>
+                <a:satMod val="150000"/>
+                <a:shade val="98000"/>
+                <a:lumMod val="102000"/>
+              </a:schemeClr>
+            </a:gs>
+            <a:gs pos="50000">
+              <a:schemeClr val="phClr">
+                <a:tint val="98000"/>
+                <a:satMod val="130000"/>
+                <a:shade val="90000"/>
+                <a:lumMod val="103000"/>
+              </a:schemeClr>
+            </a:gs>
+            <a:gs pos="100000">
+              <a:schemeClr val="phClr">
+                <a:shade val="63000"/>
+                <a:satMod val="120000"/>
+              </a:schemeClr>
+            </a:gs>
+          </a:gsLst>
+          <a:lin ang="5400000" scaled="0"/>
+        </a:gradFill>
+      </a:bgFillStyleLst>
+    </a:fmtScheme>
+  </a:themeElements>
+  <a:objectDefaults/>
+  <a:extraClrSchemeLst/>
+  <a:extLst>
+    <a:ext uri="{05A4C25C-085E-4340-85A3-A5531E510DB2}">
+      <thm15:themeFamily xmlns:thm15="http://schemas.microsoft.com/office/thememl/2012/main" name="Office Theme" id="{62F939B6-93AF-4DB8-9C6B-D6C7DFDC589F}" vid="{4A3C46E8-61CC-4603-A589-7422A47A8E4A}"/>
+    </a:ext>
+  </a:extLst>
+</a:theme>
+</file>
+
+<file path=ppt/theme/theme3.xml><?xml version="1.0" encoding="utf-8"?>
 <a:theme xmlns:a="http://schemas.openxmlformats.org/drawingml/2006/main" name="Office 테마">
   <a:themeElements>
     <a:clrScheme name="Office">
